--- a/SkyNetix_Systems.pptx
+++ b/SkyNetix_Systems.pptx
@@ -5,23 +5,23 @@
     <p:sldMasterId id="2147483648" r:id="rId1"/>
   </p:sldMasterIdLst>
   <p:sldIdLst>
-    <p:sldId id="256" r:id="rId7"/>
-    <p:sldId id="257" r:id="rId8"/>
-    <p:sldId id="258" r:id="rId9"/>
-    <p:sldId id="259" r:id="rId10"/>
-    <p:sldId id="260" r:id="rId11"/>
-    <p:sldId id="261" r:id="rId12"/>
-    <p:sldId id="262" r:id="rId13"/>
-    <p:sldId id="264" r:id="rId15"/>
-    <p:sldId id="265" r:id="rId16"/>
-    <p:sldId id="266" r:id="rId17"/>
-    <p:sldId id="267" r:id="rId18"/>
-    <p:sldId id="268" r:id="rId19"/>
-    <p:sldId id="269" r:id="rId20"/>
-    <p:sldId id="270" r:id="rId21"/>
-    <p:sldId id="263" r:id="rId14"/>
+    <p:sldId id="256" r:id="rId2"/>
+    <p:sldId id="257" r:id="rId3"/>
+    <p:sldId id="258" r:id="rId4"/>
+    <p:sldId id="259" r:id="rId5"/>
+    <p:sldId id="260" r:id="rId6"/>
+    <p:sldId id="261" r:id="rId7"/>
+    <p:sldId id="262" r:id="rId8"/>
+    <p:sldId id="264" r:id="rId9"/>
+    <p:sldId id="265" r:id="rId10"/>
+    <p:sldId id="266" r:id="rId11"/>
+    <p:sldId id="267" r:id="rId12"/>
+    <p:sldId id="268" r:id="rId13"/>
+    <p:sldId id="269" r:id="rId14"/>
+    <p:sldId id="270" r:id="rId15"/>
+    <p:sldId id="263" r:id="rId16"/>
   </p:sldIdLst>
-  <p:sldSz cx="12191695" cy="6858000" type="screen4x3"/>
+  <p:sldSz cx="12192000" cy="6858000"/>
   <p:notesSz cx="6858000" cy="9144000"/>
   <p:defaultTextStyle>
     <a:defPPr>
@@ -118,6 +118,22 @@
       </a:defRPr>
     </a:lvl9pPr>
   </p:defaultTextStyle>
+  <p:extLst>
+    <p:ext uri="{EFAFB233-063F-42B5-8137-9DF3F51BA10A}">
+      <p15:sldGuideLst xmlns:p15="http://schemas.microsoft.com/office/powerpoint/2012/main">
+        <p15:guide id="1" orient="horz" pos="2160">
+          <p15:clr>
+            <a:srgbClr val="A4A3A4"/>
+          </p15:clr>
+        </p15:guide>
+        <p15:guide id="2" pos="2880">
+          <p15:clr>
+            <a:srgbClr val="A4A3A4"/>
+          </p15:clr>
+        </p15:guide>
+      </p15:sldGuideLst>
+    </p:ext>
+  </p:extLst>
 </p:presentation>
 </file>
 
@@ -159,10 +175,9 @@
           <a:lstStyle/>
           <a:p>
             <a:r>
-              <a:rPr lang="en-US" smtClean="0"/>
+              <a:rPr lang="en-US"/>
               <a:t>Click to edit Master title style</a:t>
             </a:r>
-            <a:endParaRPr lang="en-US"/>
           </a:p>
         </p:txBody>
       </p:sp>
@@ -278,10 +293,9 @@
           </a:lstStyle>
           <a:p>
             <a:r>
-              <a:rPr lang="en-US" smtClean="0"/>
+              <a:rPr lang="en-US"/>
               <a:t>Click to edit Master subtitle style</a:t>
             </a:r>
-            <a:endParaRPr lang="en-US"/>
           </a:p>
         </p:txBody>
       </p:sp>
@@ -302,7 +316,7 @@
           <a:p>
             <a:fld id="{5BCAD085-E8A6-8845-BD4E-CB4CCA059FC4}" type="datetimeFigureOut">
               <a:rPr lang="en-US" smtClean="0"/>
-              <a:t>1/27/13</a:t>
+              <a:t>10/24/2026</a:t>
             </a:fld>
             <a:endParaRPr lang="en-US"/>
           </a:p>
@@ -396,10 +410,9 @@
           <a:lstStyle/>
           <a:p>
             <a:r>
-              <a:rPr lang="en-US" smtClean="0"/>
+              <a:rPr lang="en-US"/>
               <a:t>Click to edit Master title style</a:t>
             </a:r>
-            <a:endParaRPr lang="en-US"/>
           </a:p>
         </p:txBody>
       </p:sp>
@@ -420,38 +433,37 @@
           <a:p>
             <a:pPr lvl="0"/>
             <a:r>
-              <a:rPr lang="en-US" smtClean="0"/>
+              <a:rPr lang="en-US"/>
               <a:t>Click to edit Master text styles</a:t>
             </a:r>
           </a:p>
           <a:p>
             <a:pPr lvl="1"/>
             <a:r>
-              <a:rPr lang="en-US" smtClean="0"/>
+              <a:rPr lang="en-US"/>
               <a:t>Second level</a:t>
             </a:r>
           </a:p>
           <a:p>
             <a:pPr lvl="2"/>
             <a:r>
-              <a:rPr lang="en-US" smtClean="0"/>
+              <a:rPr lang="en-US"/>
               <a:t>Third level</a:t>
             </a:r>
           </a:p>
           <a:p>
             <a:pPr lvl="3"/>
             <a:r>
-              <a:rPr lang="en-US" smtClean="0"/>
+              <a:rPr lang="en-US"/>
               <a:t>Fourth level</a:t>
             </a:r>
           </a:p>
           <a:p>
             <a:pPr lvl="4"/>
             <a:r>
-              <a:rPr lang="en-US" smtClean="0"/>
+              <a:rPr lang="en-US"/>
               <a:t>Fifth level</a:t>
             </a:r>
-            <a:endParaRPr lang="en-US"/>
           </a:p>
         </p:txBody>
       </p:sp>
@@ -472,7 +484,7 @@
           <a:p>
             <a:fld id="{5BCAD085-E8A6-8845-BD4E-CB4CCA059FC4}" type="datetimeFigureOut">
               <a:rPr lang="en-US" smtClean="0"/>
-              <a:t>1/27/13</a:t>
+              <a:t>10/24/2026</a:t>
             </a:fld>
             <a:endParaRPr lang="en-US"/>
           </a:p>
@@ -571,10 +583,9 @@
           <a:lstStyle/>
           <a:p>
             <a:r>
-              <a:rPr lang="en-US" smtClean="0"/>
+              <a:rPr lang="en-US"/>
               <a:t>Click to edit Master title style</a:t>
             </a:r>
-            <a:endParaRPr lang="en-US"/>
           </a:p>
         </p:txBody>
       </p:sp>
@@ -600,38 +611,37 @@
           <a:p>
             <a:pPr lvl="0"/>
             <a:r>
-              <a:rPr lang="en-US" smtClean="0"/>
+              <a:rPr lang="en-US"/>
               <a:t>Click to edit Master text styles</a:t>
             </a:r>
           </a:p>
           <a:p>
             <a:pPr lvl="1"/>
             <a:r>
-              <a:rPr lang="en-US" smtClean="0"/>
+              <a:rPr lang="en-US"/>
               <a:t>Second level</a:t>
             </a:r>
           </a:p>
           <a:p>
             <a:pPr lvl="2"/>
             <a:r>
-              <a:rPr lang="en-US" smtClean="0"/>
+              <a:rPr lang="en-US"/>
               <a:t>Third level</a:t>
             </a:r>
           </a:p>
           <a:p>
             <a:pPr lvl="3"/>
             <a:r>
-              <a:rPr lang="en-US" smtClean="0"/>
+              <a:rPr lang="en-US"/>
               <a:t>Fourth level</a:t>
             </a:r>
           </a:p>
           <a:p>
             <a:pPr lvl="4"/>
             <a:r>
-              <a:rPr lang="en-US" smtClean="0"/>
+              <a:rPr lang="en-US"/>
               <a:t>Fifth level</a:t>
             </a:r>
-            <a:endParaRPr lang="en-US"/>
           </a:p>
         </p:txBody>
       </p:sp>
@@ -652,7 +662,7 @@
           <a:p>
             <a:fld id="{5BCAD085-E8A6-8845-BD4E-CB4CCA059FC4}" type="datetimeFigureOut">
               <a:rPr lang="en-US" smtClean="0"/>
-              <a:t>1/27/13</a:t>
+              <a:t>10/24/2026</a:t>
             </a:fld>
             <a:endParaRPr lang="en-US"/>
           </a:p>
@@ -746,10 +756,9 @@
           <a:lstStyle/>
           <a:p>
             <a:r>
-              <a:rPr lang="en-US" smtClean="0"/>
+              <a:rPr lang="en-US"/>
               <a:t>Click to edit Master title style</a:t>
             </a:r>
-            <a:endParaRPr lang="en-US"/>
           </a:p>
         </p:txBody>
       </p:sp>
@@ -770,38 +779,37 @@
           <a:p>
             <a:pPr lvl="0"/>
             <a:r>
-              <a:rPr lang="en-US" smtClean="0"/>
+              <a:rPr lang="en-US"/>
               <a:t>Click to edit Master text styles</a:t>
             </a:r>
           </a:p>
           <a:p>
             <a:pPr lvl="1"/>
             <a:r>
-              <a:rPr lang="en-US" smtClean="0"/>
+              <a:rPr lang="en-US"/>
               <a:t>Second level</a:t>
             </a:r>
           </a:p>
           <a:p>
             <a:pPr lvl="2"/>
             <a:r>
-              <a:rPr lang="en-US" smtClean="0"/>
+              <a:rPr lang="en-US"/>
               <a:t>Third level</a:t>
             </a:r>
           </a:p>
           <a:p>
             <a:pPr lvl="3"/>
             <a:r>
-              <a:rPr lang="en-US" smtClean="0"/>
+              <a:rPr lang="en-US"/>
               <a:t>Fourth level</a:t>
             </a:r>
           </a:p>
           <a:p>
             <a:pPr lvl="4"/>
             <a:r>
-              <a:rPr lang="en-US" smtClean="0"/>
+              <a:rPr lang="en-US"/>
               <a:t>Fifth level</a:t>
             </a:r>
-            <a:endParaRPr lang="en-US"/>
           </a:p>
         </p:txBody>
       </p:sp>
@@ -822,7 +830,7 @@
           <a:p>
             <a:fld id="{5BCAD085-E8A6-8845-BD4E-CB4CCA059FC4}" type="datetimeFigureOut">
               <a:rPr lang="en-US" smtClean="0"/>
-              <a:t>1/27/13</a:t>
+              <a:t>10/24/2026</a:t>
             </a:fld>
             <a:endParaRPr lang="en-US"/>
           </a:p>
@@ -925,10 +933,9 @@
           </a:lstStyle>
           <a:p>
             <a:r>
-              <a:rPr lang="en-US" smtClean="0"/>
+              <a:rPr lang="en-US"/>
               <a:t>Click to edit Master title style</a:t>
             </a:r>
-            <a:endParaRPr lang="en-US"/>
           </a:p>
         </p:txBody>
       </p:sp>
@@ -1045,7 +1052,7 @@
           <a:p>
             <a:pPr lvl="0"/>
             <a:r>
-              <a:rPr lang="en-US" smtClean="0"/>
+              <a:rPr lang="en-US"/>
               <a:t>Click to edit Master text styles</a:t>
             </a:r>
           </a:p>
@@ -1068,7 +1075,7 @@
           <a:p>
             <a:fld id="{5BCAD085-E8A6-8845-BD4E-CB4CCA059FC4}" type="datetimeFigureOut">
               <a:rPr lang="en-US" smtClean="0"/>
-              <a:t>1/27/13</a:t>
+              <a:t>10/24/2026</a:t>
             </a:fld>
             <a:endParaRPr lang="en-US"/>
           </a:p>
@@ -1162,10 +1169,9 @@
           <a:lstStyle/>
           <a:p>
             <a:r>
-              <a:rPr lang="en-US" smtClean="0"/>
+              <a:rPr lang="en-US"/>
               <a:t>Click to edit Master title style</a:t>
             </a:r>
-            <a:endParaRPr lang="en-US"/>
           </a:p>
         </p:txBody>
       </p:sp>
@@ -1219,38 +1225,37 @@
           <a:p>
             <a:pPr lvl="0"/>
             <a:r>
-              <a:rPr lang="en-US" smtClean="0"/>
+              <a:rPr lang="en-US"/>
               <a:t>Click to edit Master text styles</a:t>
             </a:r>
           </a:p>
           <a:p>
             <a:pPr lvl="1"/>
             <a:r>
-              <a:rPr lang="en-US" smtClean="0"/>
+              <a:rPr lang="en-US"/>
               <a:t>Second level</a:t>
             </a:r>
           </a:p>
           <a:p>
             <a:pPr lvl="2"/>
             <a:r>
-              <a:rPr lang="en-US" smtClean="0"/>
+              <a:rPr lang="en-US"/>
               <a:t>Third level</a:t>
             </a:r>
           </a:p>
           <a:p>
             <a:pPr lvl="3"/>
             <a:r>
-              <a:rPr lang="en-US" smtClean="0"/>
+              <a:rPr lang="en-US"/>
               <a:t>Fourth level</a:t>
             </a:r>
           </a:p>
           <a:p>
             <a:pPr lvl="4"/>
             <a:r>
-              <a:rPr lang="en-US" smtClean="0"/>
+              <a:rPr lang="en-US"/>
               <a:t>Fifth level</a:t>
             </a:r>
-            <a:endParaRPr lang="en-US"/>
           </a:p>
         </p:txBody>
       </p:sp>
@@ -1304,38 +1309,37 @@
           <a:p>
             <a:pPr lvl="0"/>
             <a:r>
-              <a:rPr lang="en-US" smtClean="0"/>
+              <a:rPr lang="en-US"/>
               <a:t>Click to edit Master text styles</a:t>
             </a:r>
           </a:p>
           <a:p>
             <a:pPr lvl="1"/>
             <a:r>
-              <a:rPr lang="en-US" smtClean="0"/>
+              <a:rPr lang="en-US"/>
               <a:t>Second level</a:t>
             </a:r>
           </a:p>
           <a:p>
             <a:pPr lvl="2"/>
             <a:r>
-              <a:rPr lang="en-US" smtClean="0"/>
+              <a:rPr lang="en-US"/>
               <a:t>Third level</a:t>
             </a:r>
           </a:p>
           <a:p>
             <a:pPr lvl="3"/>
             <a:r>
-              <a:rPr lang="en-US" smtClean="0"/>
+              <a:rPr lang="en-US"/>
               <a:t>Fourth level</a:t>
             </a:r>
           </a:p>
           <a:p>
             <a:pPr lvl="4"/>
             <a:r>
-              <a:rPr lang="en-US" smtClean="0"/>
+              <a:rPr lang="en-US"/>
               <a:t>Fifth level</a:t>
             </a:r>
-            <a:endParaRPr lang="en-US"/>
           </a:p>
         </p:txBody>
       </p:sp>
@@ -1356,7 +1360,7 @@
           <a:p>
             <a:fld id="{5BCAD085-E8A6-8845-BD4E-CB4CCA059FC4}" type="datetimeFigureOut">
               <a:rPr lang="en-US" smtClean="0"/>
-              <a:t>1/27/13</a:t>
+              <a:t>10/24/2026</a:t>
             </a:fld>
             <a:endParaRPr lang="en-US"/>
           </a:p>
@@ -1454,10 +1458,9 @@
           </a:lstStyle>
           <a:p>
             <a:r>
-              <a:rPr lang="en-US" smtClean="0"/>
+              <a:rPr lang="en-US"/>
               <a:t>Click to edit Master title style</a:t>
             </a:r>
-            <a:endParaRPr lang="en-US"/>
           </a:p>
         </p:txBody>
       </p:sp>
@@ -1520,7 +1523,7 @@
           <a:p>
             <a:pPr lvl="0"/>
             <a:r>
-              <a:rPr lang="en-US" smtClean="0"/>
+              <a:rPr lang="en-US"/>
               <a:t>Click to edit Master text styles</a:t>
             </a:r>
           </a:p>
@@ -1576,38 +1579,37 @@
           <a:p>
             <a:pPr lvl="0"/>
             <a:r>
-              <a:rPr lang="en-US" smtClean="0"/>
+              <a:rPr lang="en-US"/>
               <a:t>Click to edit Master text styles</a:t>
             </a:r>
           </a:p>
           <a:p>
             <a:pPr lvl="1"/>
             <a:r>
-              <a:rPr lang="en-US" smtClean="0"/>
+              <a:rPr lang="en-US"/>
               <a:t>Second level</a:t>
             </a:r>
           </a:p>
           <a:p>
             <a:pPr lvl="2"/>
             <a:r>
-              <a:rPr lang="en-US" smtClean="0"/>
+              <a:rPr lang="en-US"/>
               <a:t>Third level</a:t>
             </a:r>
           </a:p>
           <a:p>
             <a:pPr lvl="3"/>
             <a:r>
-              <a:rPr lang="en-US" smtClean="0"/>
+              <a:rPr lang="en-US"/>
               <a:t>Fourth level</a:t>
             </a:r>
           </a:p>
           <a:p>
             <a:pPr lvl="4"/>
             <a:r>
-              <a:rPr lang="en-US" smtClean="0"/>
+              <a:rPr lang="en-US"/>
               <a:t>Fifth level</a:t>
             </a:r>
-            <a:endParaRPr lang="en-US"/>
           </a:p>
         </p:txBody>
       </p:sp>
@@ -1670,7 +1672,7 @@
           <a:p>
             <a:pPr lvl="0"/>
             <a:r>
-              <a:rPr lang="en-US" smtClean="0"/>
+              <a:rPr lang="en-US"/>
               <a:t>Click to edit Master text styles</a:t>
             </a:r>
           </a:p>
@@ -1726,38 +1728,37 @@
           <a:p>
             <a:pPr lvl="0"/>
             <a:r>
-              <a:rPr lang="en-US" smtClean="0"/>
+              <a:rPr lang="en-US"/>
               <a:t>Click to edit Master text styles</a:t>
             </a:r>
           </a:p>
           <a:p>
             <a:pPr lvl="1"/>
             <a:r>
-              <a:rPr lang="en-US" smtClean="0"/>
+              <a:rPr lang="en-US"/>
               <a:t>Second level</a:t>
             </a:r>
           </a:p>
           <a:p>
             <a:pPr lvl="2"/>
             <a:r>
-              <a:rPr lang="en-US" smtClean="0"/>
+              <a:rPr lang="en-US"/>
               <a:t>Third level</a:t>
             </a:r>
           </a:p>
           <a:p>
             <a:pPr lvl="3"/>
             <a:r>
-              <a:rPr lang="en-US" smtClean="0"/>
+              <a:rPr lang="en-US"/>
               <a:t>Fourth level</a:t>
             </a:r>
           </a:p>
           <a:p>
             <a:pPr lvl="4"/>
             <a:r>
-              <a:rPr lang="en-US" smtClean="0"/>
+              <a:rPr lang="en-US"/>
               <a:t>Fifth level</a:t>
             </a:r>
-            <a:endParaRPr lang="en-US"/>
           </a:p>
         </p:txBody>
       </p:sp>
@@ -1778,7 +1779,7 @@
           <a:p>
             <a:fld id="{5BCAD085-E8A6-8845-BD4E-CB4CCA059FC4}" type="datetimeFigureOut">
               <a:rPr lang="en-US" smtClean="0"/>
-              <a:t>1/27/13</a:t>
+              <a:t>10/24/2026</a:t>
             </a:fld>
             <a:endParaRPr lang="en-US"/>
           </a:p>
@@ -1872,10 +1873,9 @@
           <a:lstStyle/>
           <a:p>
             <a:r>
-              <a:rPr lang="en-US" smtClean="0"/>
+              <a:rPr lang="en-US"/>
               <a:t>Click to edit Master title style</a:t>
             </a:r>
-            <a:endParaRPr lang="en-US"/>
           </a:p>
         </p:txBody>
       </p:sp>
@@ -1896,7 +1896,7 @@
           <a:p>
             <a:fld id="{5BCAD085-E8A6-8845-BD4E-CB4CCA059FC4}" type="datetimeFigureOut">
               <a:rPr lang="en-US" smtClean="0"/>
-              <a:t>1/27/13</a:t>
+              <a:t>10/24/2026</a:t>
             </a:fld>
             <a:endParaRPr lang="en-US"/>
           </a:p>
@@ -1991,7 +1991,7 @@
           <a:p>
             <a:fld id="{5BCAD085-E8A6-8845-BD4E-CB4CCA059FC4}" type="datetimeFigureOut">
               <a:rPr lang="en-US" smtClean="0"/>
-              <a:t>1/27/13</a:t>
+              <a:t>10/24/2026</a:t>
             </a:fld>
             <a:endParaRPr lang="en-US"/>
           </a:p>
@@ -2094,10 +2094,9 @@
           </a:lstStyle>
           <a:p>
             <a:r>
-              <a:rPr lang="en-US" smtClean="0"/>
+              <a:rPr lang="en-US"/>
               <a:t>Click to edit Master title style</a:t>
             </a:r>
-            <a:endParaRPr lang="en-US"/>
           </a:p>
         </p:txBody>
       </p:sp>
@@ -2151,38 +2150,37 @@
           <a:p>
             <a:pPr lvl="0"/>
             <a:r>
-              <a:rPr lang="en-US" smtClean="0"/>
+              <a:rPr lang="en-US"/>
               <a:t>Click to edit Master text styles</a:t>
             </a:r>
           </a:p>
           <a:p>
             <a:pPr lvl="1"/>
             <a:r>
-              <a:rPr lang="en-US" smtClean="0"/>
+              <a:rPr lang="en-US"/>
               <a:t>Second level</a:t>
             </a:r>
           </a:p>
           <a:p>
             <a:pPr lvl="2"/>
             <a:r>
-              <a:rPr lang="en-US" smtClean="0"/>
+              <a:rPr lang="en-US"/>
               <a:t>Third level</a:t>
             </a:r>
           </a:p>
           <a:p>
             <a:pPr lvl="3"/>
             <a:r>
-              <a:rPr lang="en-US" smtClean="0"/>
+              <a:rPr lang="en-US"/>
               <a:t>Fourth level</a:t>
             </a:r>
           </a:p>
           <a:p>
             <a:pPr lvl="4"/>
             <a:r>
-              <a:rPr lang="en-US" smtClean="0"/>
+              <a:rPr lang="en-US"/>
               <a:t>Fifth level</a:t>
             </a:r>
-            <a:endParaRPr lang="en-US"/>
           </a:p>
         </p:txBody>
       </p:sp>
@@ -2245,7 +2243,7 @@
           <a:p>
             <a:pPr lvl="0"/>
             <a:r>
-              <a:rPr lang="en-US" smtClean="0"/>
+              <a:rPr lang="en-US"/>
               <a:t>Click to edit Master text styles</a:t>
             </a:r>
           </a:p>
@@ -2268,7 +2266,7 @@
           <a:p>
             <a:fld id="{5BCAD085-E8A6-8845-BD4E-CB4CCA059FC4}" type="datetimeFigureOut">
               <a:rPr lang="en-US" smtClean="0"/>
-              <a:t>1/27/13</a:t>
+              <a:t>10/24/2026</a:t>
             </a:fld>
             <a:endParaRPr lang="en-US"/>
           </a:p>
@@ -2371,10 +2369,9 @@
           </a:lstStyle>
           <a:p>
             <a:r>
-              <a:rPr lang="en-US" smtClean="0"/>
+              <a:rPr lang="en-US"/>
               <a:t>Click to edit Master title style</a:t>
             </a:r>
-            <a:endParaRPr lang="en-US"/>
           </a:p>
         </p:txBody>
       </p:sp>
@@ -2498,7 +2495,7 @@
           <a:p>
             <a:pPr lvl="0"/>
             <a:r>
-              <a:rPr lang="en-US" smtClean="0"/>
+              <a:rPr lang="en-US"/>
               <a:t>Click to edit Master text styles</a:t>
             </a:r>
           </a:p>
@@ -2521,7 +2518,7 @@
           <a:p>
             <a:fld id="{5BCAD085-E8A6-8845-BD4E-CB4CCA059FC4}" type="datetimeFigureOut">
               <a:rPr lang="en-US" smtClean="0"/>
-              <a:t>1/27/13</a:t>
+              <a:t>10/24/2026</a:t>
             </a:fld>
             <a:endParaRPr lang="en-US"/>
           </a:p>
@@ -2630,10 +2627,9 @@
           <a:lstStyle/>
           <a:p>
             <a:r>
-              <a:rPr lang="en-US" smtClean="0"/>
+              <a:rPr lang="en-US"/>
               <a:t>Click to edit Master title style</a:t>
             </a:r>
-            <a:endParaRPr lang="en-US"/>
           </a:p>
         </p:txBody>
       </p:sp>
@@ -2664,38 +2660,37 @@
           <a:p>
             <a:pPr lvl="0"/>
             <a:r>
-              <a:rPr lang="en-US" smtClean="0"/>
+              <a:rPr lang="en-US"/>
               <a:t>Click to edit Master text styles</a:t>
             </a:r>
           </a:p>
           <a:p>
             <a:pPr lvl="1"/>
             <a:r>
-              <a:rPr lang="en-US" smtClean="0"/>
+              <a:rPr lang="en-US"/>
               <a:t>Second level</a:t>
             </a:r>
           </a:p>
           <a:p>
             <a:pPr lvl="2"/>
             <a:r>
-              <a:rPr lang="en-US" smtClean="0"/>
+              <a:rPr lang="en-US"/>
               <a:t>Third level</a:t>
             </a:r>
           </a:p>
           <a:p>
             <a:pPr lvl="3"/>
             <a:r>
-              <a:rPr lang="en-US" smtClean="0"/>
+              <a:rPr lang="en-US"/>
               <a:t>Fourth level</a:t>
             </a:r>
           </a:p>
           <a:p>
             <a:pPr lvl="4"/>
             <a:r>
-              <a:rPr lang="en-US" smtClean="0"/>
+              <a:rPr lang="en-US"/>
               <a:t>Fifth level</a:t>
             </a:r>
-            <a:endParaRPr lang="en-US"/>
           </a:p>
         </p:txBody>
       </p:sp>
@@ -2734,7 +2729,7 @@
           <a:p>
             <a:fld id="{5BCAD085-E8A6-8845-BD4E-CB4CCA059FC4}" type="datetimeFigureOut">
               <a:rPr lang="en-US" smtClean="0"/>
-              <a:t>1/27/13</a:t>
+              <a:t>10/24/2026</a:t>
             </a:fld>
             <a:endParaRPr lang="en-US"/>
           </a:p>
@@ -3093,7 +3088,7 @@
 </file>
 
 <file path=ppt/slides/slide1.xml><?xml version="1.0" encoding="utf-8"?>
-<p:sld xmlns:a="http://schemas.openxmlformats.org/drawingml/2006/main" xmlns:p="http://schemas.openxmlformats.org/presentationml/2006/main" xmlns:r="http://schemas.openxmlformats.org/officeDocument/2006/relationships">
+<p:sld xmlns:a="http://schemas.openxmlformats.org/drawingml/2006/main" xmlns:r="http://schemas.openxmlformats.org/officeDocument/2006/relationships" xmlns:p="http://schemas.openxmlformats.org/presentationml/2006/main">
   <p:cSld>
     <p:bg>
       <p:bgPr>
@@ -3109,7 +3104,14 @@
         <p:cNvGrpSpPr/>
         <p:nvPr/>
       </p:nvGrpSpPr>
-      <p:grpSpPr/>
+      <p:grpSpPr>
+        <a:xfrm>
+          <a:off x="0" y="0"/>
+          <a:ext cx="0" cy="0"/>
+          <a:chOff x="0" y="0"/>
+          <a:chExt cx="0" cy="0"/>
+        </a:xfrm>
+      </p:grpSpPr>
       <p:sp>
         <p:nvSpPr>
           <p:cNvPr id="2" name="Oval 1"/>
@@ -3150,6 +3152,7 @@
           <a:lstStyle/>
           <a:p>
             <a:pPr algn="ctr"/>
+            <a:endParaRPr/>
           </a:p>
         </p:txBody>
       </p:sp>
@@ -3193,6 +3196,7 @@
           <a:lstStyle/>
           <a:p>
             <a:pPr algn="ctr"/>
+            <a:endParaRPr/>
           </a:p>
         </p:txBody>
       </p:sp>
@@ -3236,6 +3240,7 @@
           <a:lstStyle/>
           <a:p>
             <a:pPr algn="ctr"/>
+            <a:endParaRPr/>
           </a:p>
         </p:txBody>
       </p:sp>
@@ -3279,6 +3284,7 @@
           <a:lstStyle/>
           <a:p>
             <a:pPr algn="ctr"/>
+            <a:endParaRPr/>
           </a:p>
         </p:txBody>
       </p:sp>
@@ -3299,7 +3305,7 @@
           <a:noFill/>
         </p:spPr>
         <p:txBody>
-          <a:bodyPr wrap="square" lIns="36576" rIns="36576" tIns="36576" bIns="36576" anchor="t">
+          <a:bodyPr wrap="square" lIns="36576" tIns="36576" rIns="36576" bIns="36576" anchor="t">
             <a:spAutoFit/>
           </a:bodyPr>
           <a:lstStyle/>
@@ -3338,7 +3344,7 @@
           <a:noFill/>
         </p:spPr>
         <p:txBody>
-          <a:bodyPr wrap="square" lIns="36576" rIns="36576" tIns="36576" bIns="36576" anchor="t">
+          <a:bodyPr wrap="square" lIns="36576" tIns="36576" rIns="36576" bIns="36576" anchor="t">
             <a:spAutoFit/>
           </a:bodyPr>
           <a:lstStyle/>
@@ -3400,6 +3406,7 @@
           <a:lstStyle/>
           <a:p>
             <a:pPr algn="ctr"/>
+            <a:endParaRPr/>
           </a:p>
         </p:txBody>
       </p:sp>
@@ -3420,7 +3427,7 @@
           <a:noFill/>
         </p:spPr>
         <p:txBody>
-          <a:bodyPr wrap="square" lIns="36576" rIns="36576" tIns="36576" bIns="36576" anchor="t">
+          <a:bodyPr wrap="square" lIns="36576" tIns="36576" rIns="36576" bIns="36576" anchor="t">
             <a:spAutoFit/>
           </a:bodyPr>
           <a:lstStyle/>
@@ -3460,7 +3467,7 @@
           <a:noFill/>
         </p:spPr>
         <p:txBody>
-          <a:bodyPr wrap="square" lIns="36576" rIns="36576" tIns="36576" bIns="36576" anchor="t">
+          <a:bodyPr wrap="square" lIns="36576" tIns="36576" rIns="36576" bIns="36576" anchor="t">
             <a:spAutoFit/>
           </a:bodyPr>
           <a:lstStyle/>
@@ -3499,7 +3506,7 @@
           <a:noFill/>
         </p:spPr>
         <p:txBody>
-          <a:bodyPr wrap="square" lIns="36576" rIns="36576" tIns="36576" bIns="36576" anchor="t">
+          <a:bodyPr wrap="square" lIns="36576" tIns="36576" rIns="36576" bIns="36576" anchor="t">
             <a:spAutoFit/>
           </a:bodyPr>
           <a:lstStyle/>
@@ -3538,7 +3545,7 @@
           <a:noFill/>
         </p:spPr>
         <p:txBody>
-          <a:bodyPr wrap="square" lIns="36576" rIns="36576" tIns="36576" bIns="36576" anchor="t">
+          <a:bodyPr wrap="square" lIns="36576" tIns="36576" rIns="36576" bIns="36576" anchor="t">
             <a:spAutoFit/>
           </a:bodyPr>
           <a:lstStyle/>
@@ -3577,7 +3584,7 @@
           <a:noFill/>
         </p:spPr>
         <p:txBody>
-          <a:bodyPr wrap="square" lIns="36576" rIns="36576" tIns="36576" bIns="36576" anchor="t">
+          <a:bodyPr wrap="square" lIns="36576" tIns="36576" rIns="36576" bIns="36576" anchor="t">
             <a:spAutoFit/>
           </a:bodyPr>
           <a:lstStyle/>
@@ -3710,7 +3717,7 @@
 </file>
 
 <file path=ppt/slides/slide10.xml><?xml version="1.0" encoding="utf-8"?>
-<p:sld xmlns:a="http://schemas.openxmlformats.org/drawingml/2006/main" xmlns:p="http://schemas.openxmlformats.org/presentationml/2006/main" xmlns:r="http://schemas.openxmlformats.org/officeDocument/2006/relationships">
+<p:sld xmlns:a="http://schemas.openxmlformats.org/drawingml/2006/main" xmlns:r="http://schemas.openxmlformats.org/officeDocument/2006/relationships" xmlns:p="http://schemas.openxmlformats.org/presentationml/2006/main">
   <p:cSld>
     <p:spTree>
       <p:nvGrpSpPr>
@@ -3718,7 +3725,14 @@
         <p:cNvGrpSpPr/>
         <p:nvPr/>
       </p:nvGrpSpPr>
-      <p:grpSpPr/>
+      <p:grpSpPr>
+        <a:xfrm>
+          <a:off x="0" y="0"/>
+          <a:ext cx="0" cy="0"/>
+          <a:chOff x="0" y="0"/>
+          <a:chExt cx="0" cy="0"/>
+        </a:xfrm>
+      </p:grpSpPr>
       <p:sp>
         <p:nvSpPr>
           <p:cNvPr id="2" name="TextBox 1"/>
@@ -3736,7 +3750,7 @@
           <a:noFill/>
         </p:spPr>
         <p:txBody>
-          <a:bodyPr wrap="square" lIns="36576" rIns="36576" tIns="36576" bIns="36576">
+          <a:bodyPr wrap="square" lIns="36576" tIns="36576" rIns="36576" bIns="36576">
             <a:spAutoFit/>
           </a:bodyPr>
           <a:lstStyle/>
@@ -3798,6 +3812,7 @@
           <a:lstStyle/>
           <a:p>
             <a:pPr algn="ctr"/>
+            <a:endParaRPr/>
           </a:p>
         </p:txBody>
       </p:sp>
@@ -3818,7 +3833,7 @@
           <a:noFill/>
         </p:spPr>
         <p:txBody>
-          <a:bodyPr wrap="square" lIns="36576" rIns="36576" tIns="36576" bIns="36576">
+          <a:bodyPr wrap="square" lIns="36576" tIns="36576" rIns="36576" bIns="36576">
             <a:spAutoFit/>
           </a:bodyPr>
           <a:lstStyle/>
@@ -3857,7 +3872,7 @@
           <a:noFill/>
         </p:spPr>
         <p:txBody>
-          <a:bodyPr wrap="square" lIns="36576" rIns="36576" tIns="36576" bIns="36576">
+          <a:bodyPr wrap="square" lIns="36576" tIns="36576" rIns="36576" bIns="36576">
             <a:spAutoFit/>
           </a:bodyPr>
           <a:lstStyle/>
@@ -3921,6 +3936,7 @@
           <a:lstStyle/>
           <a:p>
             <a:pPr algn="ctr"/>
+            <a:endParaRPr/>
           </a:p>
         </p:txBody>
       </p:sp>
@@ -3964,6 +3980,7 @@
           <a:lstStyle/>
           <a:p>
             <a:pPr algn="ctr"/>
+            <a:endParaRPr/>
           </a:p>
         </p:txBody>
       </p:sp>
@@ -3984,7 +4001,7 @@
           <a:noFill/>
         </p:spPr>
         <p:txBody>
-          <a:bodyPr wrap="square" lIns="36576" rIns="36576" tIns="36576" bIns="36576">
+          <a:bodyPr wrap="square" lIns="36576" tIns="36576" rIns="36576" bIns="36576">
             <a:spAutoFit/>
           </a:bodyPr>
           <a:lstStyle/>
@@ -4023,7 +4040,7 @@
           <a:noFill/>
         </p:spPr>
         <p:txBody>
-          <a:bodyPr wrap="square" lIns="36576" rIns="36576" tIns="36576" bIns="36576">
+          <a:bodyPr wrap="square" lIns="36576" tIns="36576" rIns="36576" bIns="36576">
             <a:spAutoFit/>
           </a:bodyPr>
           <a:lstStyle/>
@@ -4089,6 +4106,7 @@
           <a:lstStyle/>
           <a:p>
             <a:pPr algn="ctr"/>
+            <a:endParaRPr/>
           </a:p>
         </p:txBody>
       </p:sp>
@@ -4132,6 +4150,7 @@
           <a:lstStyle/>
           <a:p>
             <a:pPr algn="ctr"/>
+            <a:endParaRPr/>
           </a:p>
         </p:txBody>
       </p:sp>
@@ -4152,7 +4171,7 @@
           <a:noFill/>
         </p:spPr>
         <p:txBody>
-          <a:bodyPr wrap="square" lIns="36576" rIns="36576" tIns="36576" bIns="36576">
+          <a:bodyPr wrap="square" lIns="36576" tIns="36576" rIns="36576" bIns="36576">
             <a:spAutoFit/>
           </a:bodyPr>
           <a:lstStyle/>
@@ -4191,7 +4210,7 @@
           <a:noFill/>
         </p:spPr>
         <p:txBody>
-          <a:bodyPr wrap="square" lIns="36576" rIns="36576" tIns="36576" bIns="36576">
+          <a:bodyPr wrap="square" lIns="36576" tIns="36576" rIns="36576" bIns="36576">
             <a:spAutoFit/>
           </a:bodyPr>
           <a:lstStyle/>
@@ -4257,6 +4276,7 @@
           <a:lstStyle/>
           <a:p>
             <a:pPr algn="ctr"/>
+            <a:endParaRPr/>
           </a:p>
         </p:txBody>
       </p:sp>
@@ -4300,6 +4320,7 @@
           <a:lstStyle/>
           <a:p>
             <a:pPr algn="ctr"/>
+            <a:endParaRPr/>
           </a:p>
         </p:txBody>
       </p:sp>
@@ -4320,7 +4341,7 @@
           <a:noFill/>
         </p:spPr>
         <p:txBody>
-          <a:bodyPr wrap="square" lIns="36576" rIns="36576" tIns="36576" bIns="36576">
+          <a:bodyPr wrap="square" lIns="36576" tIns="36576" rIns="36576" bIns="36576">
             <a:spAutoFit/>
           </a:bodyPr>
           <a:lstStyle/>
@@ -4359,7 +4380,7 @@
           <a:noFill/>
         </p:spPr>
         <p:txBody>
-          <a:bodyPr wrap="square" lIns="36576" rIns="36576" tIns="36576" bIns="36576">
+          <a:bodyPr wrap="square" lIns="36576" tIns="36576" rIns="36576" bIns="36576">
             <a:spAutoFit/>
           </a:bodyPr>
           <a:lstStyle/>
@@ -4400,7 +4421,7 @@
           <a:noFill/>
         </p:spPr>
         <p:txBody>
-          <a:bodyPr wrap="square" lIns="36576" rIns="36576" tIns="36576" bIns="36576">
+          <a:bodyPr wrap="square" lIns="36576" tIns="36576" rIns="36576" bIns="36576">
             <a:spAutoFit/>
           </a:bodyPr>
           <a:lstStyle/>
@@ -4439,7 +4460,7 @@
           <a:noFill/>
         </p:spPr>
         <p:txBody>
-          <a:bodyPr wrap="square" lIns="45720" rIns="45720" tIns="18288" bIns="18288">
+          <a:bodyPr wrap="square" lIns="45720" tIns="18288" rIns="45720" bIns="18288">
             <a:spAutoFit/>
           </a:bodyPr>
           <a:lstStyle/>
@@ -4526,7 +4547,7 @@
 </file>
 
 <file path=ppt/slides/slide11.xml><?xml version="1.0" encoding="utf-8"?>
-<p:sld xmlns:a="http://schemas.openxmlformats.org/drawingml/2006/main" xmlns:p="http://schemas.openxmlformats.org/presentationml/2006/main" xmlns:r="http://schemas.openxmlformats.org/officeDocument/2006/relationships">
+<p:sld xmlns:a="http://schemas.openxmlformats.org/drawingml/2006/main" xmlns:r="http://schemas.openxmlformats.org/officeDocument/2006/relationships" xmlns:p="http://schemas.openxmlformats.org/presentationml/2006/main">
   <p:cSld>
     <p:spTree>
       <p:nvGrpSpPr>
@@ -4534,7 +4555,14 @@
         <p:cNvGrpSpPr/>
         <p:nvPr/>
       </p:nvGrpSpPr>
-      <p:grpSpPr/>
+      <p:grpSpPr>
+        <a:xfrm>
+          <a:off x="0" y="0"/>
+          <a:ext cx="0" cy="0"/>
+          <a:chOff x="0" y="0"/>
+          <a:chExt cx="0" cy="0"/>
+        </a:xfrm>
+      </p:grpSpPr>
       <p:sp>
         <p:nvSpPr>
           <p:cNvPr id="2" name="TextBox 1"/>
@@ -4552,7 +4580,7 @@
           <a:noFill/>
         </p:spPr>
         <p:txBody>
-          <a:bodyPr wrap="square" lIns="36576" rIns="36576" tIns="36576" bIns="36576">
+          <a:bodyPr wrap="square" lIns="36576" tIns="36576" rIns="36576" bIns="36576">
             <a:spAutoFit/>
           </a:bodyPr>
           <a:lstStyle/>
@@ -4614,6 +4642,7 @@
           <a:lstStyle/>
           <a:p>
             <a:pPr algn="ctr"/>
+            <a:endParaRPr/>
           </a:p>
         </p:txBody>
       </p:sp>
@@ -4634,7 +4663,7 @@
           <a:noFill/>
         </p:spPr>
         <p:txBody>
-          <a:bodyPr wrap="square" lIns="36576" rIns="36576" tIns="36576" bIns="36576">
+          <a:bodyPr wrap="square" lIns="36576" tIns="36576" rIns="36576" bIns="36576">
             <a:spAutoFit/>
           </a:bodyPr>
           <a:lstStyle/>
@@ -4673,7 +4702,7 @@
           <a:noFill/>
         </p:spPr>
         <p:txBody>
-          <a:bodyPr wrap="square" lIns="36576" rIns="36576" tIns="36576" bIns="36576">
+          <a:bodyPr wrap="square" lIns="36576" tIns="36576" rIns="36576" bIns="36576">
             <a:spAutoFit/>
           </a:bodyPr>
           <a:lstStyle/>
@@ -4737,6 +4766,7 @@
           <a:lstStyle/>
           <a:p>
             <a:pPr algn="ctr"/>
+            <a:endParaRPr/>
           </a:p>
         </p:txBody>
       </p:sp>
@@ -4780,6 +4810,7 @@
           <a:lstStyle/>
           <a:p>
             <a:pPr algn="ctr"/>
+            <a:endParaRPr/>
           </a:p>
         </p:txBody>
       </p:sp>
@@ -4800,7 +4831,7 @@
           <a:noFill/>
         </p:spPr>
         <p:txBody>
-          <a:bodyPr wrap="square" lIns="36576" rIns="36576" tIns="36576" bIns="36576">
+          <a:bodyPr wrap="square" lIns="36576" tIns="36576" rIns="36576" bIns="36576">
             <a:spAutoFit/>
           </a:bodyPr>
           <a:lstStyle/>
@@ -4839,7 +4870,7 @@
           <a:noFill/>
         </p:spPr>
         <p:txBody>
-          <a:bodyPr wrap="square" lIns="36576" rIns="36576" tIns="36576" bIns="36576">
+          <a:bodyPr wrap="square" lIns="36576" tIns="36576" rIns="36576" bIns="36576">
             <a:spAutoFit/>
           </a:bodyPr>
           <a:lstStyle/>
@@ -4905,6 +4936,7 @@
           <a:lstStyle/>
           <a:p>
             <a:pPr algn="ctr"/>
+            <a:endParaRPr/>
           </a:p>
         </p:txBody>
       </p:sp>
@@ -4948,6 +4980,7 @@
           <a:lstStyle/>
           <a:p>
             <a:pPr algn="ctr"/>
+            <a:endParaRPr/>
           </a:p>
         </p:txBody>
       </p:sp>
@@ -4968,7 +5001,7 @@
           <a:noFill/>
         </p:spPr>
         <p:txBody>
-          <a:bodyPr wrap="square" lIns="36576" rIns="36576" tIns="36576" bIns="36576">
+          <a:bodyPr wrap="square" lIns="36576" tIns="36576" rIns="36576" bIns="36576">
             <a:spAutoFit/>
           </a:bodyPr>
           <a:lstStyle/>
@@ -5007,7 +5040,7 @@
           <a:noFill/>
         </p:spPr>
         <p:txBody>
-          <a:bodyPr wrap="square" lIns="36576" rIns="36576" tIns="36576" bIns="36576">
+          <a:bodyPr wrap="square" lIns="36576" tIns="36576" rIns="36576" bIns="36576">
             <a:spAutoFit/>
           </a:bodyPr>
           <a:lstStyle/>
@@ -5073,6 +5106,7 @@
           <a:lstStyle/>
           <a:p>
             <a:pPr algn="ctr"/>
+            <a:endParaRPr/>
           </a:p>
         </p:txBody>
       </p:sp>
@@ -5116,6 +5150,7 @@
           <a:lstStyle/>
           <a:p>
             <a:pPr algn="ctr"/>
+            <a:endParaRPr/>
           </a:p>
         </p:txBody>
       </p:sp>
@@ -5136,7 +5171,7 @@
           <a:noFill/>
         </p:spPr>
         <p:txBody>
-          <a:bodyPr wrap="square" lIns="36576" rIns="36576" tIns="36576" bIns="36576">
+          <a:bodyPr wrap="square" lIns="36576" tIns="36576" rIns="36576" bIns="36576">
             <a:spAutoFit/>
           </a:bodyPr>
           <a:lstStyle/>
@@ -5175,7 +5210,7 @@
           <a:noFill/>
         </p:spPr>
         <p:txBody>
-          <a:bodyPr wrap="square" lIns="36576" rIns="36576" tIns="36576" bIns="36576">
+          <a:bodyPr wrap="square" lIns="36576" tIns="36576" rIns="36576" bIns="36576">
             <a:spAutoFit/>
           </a:bodyPr>
           <a:lstStyle/>
@@ -5216,7 +5251,7 @@
           <a:noFill/>
         </p:spPr>
         <p:txBody>
-          <a:bodyPr wrap="square" lIns="36576" rIns="36576" tIns="36576" bIns="36576">
+          <a:bodyPr wrap="square" lIns="36576" tIns="36576" rIns="36576" bIns="36576">
             <a:spAutoFit/>
           </a:bodyPr>
           <a:lstStyle/>
@@ -5255,7 +5290,7 @@
           <a:noFill/>
         </p:spPr>
         <p:txBody>
-          <a:bodyPr wrap="square" lIns="45720" rIns="45720" tIns="18288" bIns="18288">
+          <a:bodyPr wrap="square" lIns="45720" tIns="18288" rIns="45720" bIns="18288">
             <a:spAutoFit/>
           </a:bodyPr>
           <a:lstStyle/>
@@ -5342,7 +5377,7 @@
 </file>
 
 <file path=ppt/slides/slide12.xml><?xml version="1.0" encoding="utf-8"?>
-<p:sld xmlns:a="http://schemas.openxmlformats.org/drawingml/2006/main" xmlns:p="http://schemas.openxmlformats.org/presentationml/2006/main" xmlns:r="http://schemas.openxmlformats.org/officeDocument/2006/relationships">
+<p:sld xmlns:a="http://schemas.openxmlformats.org/drawingml/2006/main" xmlns:r="http://schemas.openxmlformats.org/officeDocument/2006/relationships" xmlns:p="http://schemas.openxmlformats.org/presentationml/2006/main">
   <p:cSld>
     <p:spTree>
       <p:nvGrpSpPr>
@@ -5350,7 +5385,14 @@
         <p:cNvGrpSpPr/>
         <p:nvPr/>
       </p:nvGrpSpPr>
-      <p:grpSpPr/>
+      <p:grpSpPr>
+        <a:xfrm>
+          <a:off x="0" y="0"/>
+          <a:ext cx="0" cy="0"/>
+          <a:chOff x="0" y="0"/>
+          <a:chExt cx="0" cy="0"/>
+        </a:xfrm>
+      </p:grpSpPr>
       <p:sp>
         <p:nvSpPr>
           <p:cNvPr id="2" name="TextBox 1"/>
@@ -5368,7 +5410,7 @@
           <a:noFill/>
         </p:spPr>
         <p:txBody>
-          <a:bodyPr wrap="square" lIns="36576" rIns="36576" tIns="36576" bIns="36576">
+          <a:bodyPr wrap="square" lIns="36576" tIns="36576" rIns="36576" bIns="36576">
             <a:spAutoFit/>
           </a:bodyPr>
           <a:lstStyle/>
@@ -5430,6 +5472,7 @@
           <a:lstStyle/>
           <a:p>
             <a:pPr algn="ctr"/>
+            <a:endParaRPr/>
           </a:p>
         </p:txBody>
       </p:sp>
@@ -5450,7 +5493,7 @@
           <a:noFill/>
         </p:spPr>
         <p:txBody>
-          <a:bodyPr wrap="square" lIns="36576" rIns="36576" tIns="36576" bIns="36576">
+          <a:bodyPr wrap="square" lIns="36576" tIns="36576" rIns="36576" bIns="36576">
             <a:spAutoFit/>
           </a:bodyPr>
           <a:lstStyle/>
@@ -5489,7 +5532,7 @@
           <a:noFill/>
         </p:spPr>
         <p:txBody>
-          <a:bodyPr wrap="square" lIns="36576" rIns="36576" tIns="36576" bIns="36576">
+          <a:bodyPr wrap="square" lIns="36576" tIns="36576" rIns="36576" bIns="36576">
             <a:spAutoFit/>
           </a:bodyPr>
           <a:lstStyle/>
@@ -5553,6 +5596,7 @@
           <a:lstStyle/>
           <a:p>
             <a:pPr algn="ctr"/>
+            <a:endParaRPr/>
           </a:p>
         </p:txBody>
       </p:sp>
@@ -5596,6 +5640,7 @@
           <a:lstStyle/>
           <a:p>
             <a:pPr algn="ctr"/>
+            <a:endParaRPr/>
           </a:p>
         </p:txBody>
       </p:sp>
@@ -5616,7 +5661,7 @@
           <a:noFill/>
         </p:spPr>
         <p:txBody>
-          <a:bodyPr wrap="square" lIns="36576" rIns="36576" tIns="36576" bIns="36576">
+          <a:bodyPr wrap="square" lIns="36576" tIns="36576" rIns="36576" bIns="36576">
             <a:spAutoFit/>
           </a:bodyPr>
           <a:lstStyle/>
@@ -5655,7 +5700,7 @@
           <a:noFill/>
         </p:spPr>
         <p:txBody>
-          <a:bodyPr wrap="square" lIns="36576" rIns="36576" tIns="36576" bIns="36576">
+          <a:bodyPr wrap="square" lIns="36576" tIns="36576" rIns="36576" bIns="36576">
             <a:spAutoFit/>
           </a:bodyPr>
           <a:lstStyle/>
@@ -5721,6 +5766,7 @@
           <a:lstStyle/>
           <a:p>
             <a:pPr algn="ctr"/>
+            <a:endParaRPr/>
           </a:p>
         </p:txBody>
       </p:sp>
@@ -5764,6 +5810,7 @@
           <a:lstStyle/>
           <a:p>
             <a:pPr algn="ctr"/>
+            <a:endParaRPr/>
           </a:p>
         </p:txBody>
       </p:sp>
@@ -5784,7 +5831,7 @@
           <a:noFill/>
         </p:spPr>
         <p:txBody>
-          <a:bodyPr wrap="square" lIns="36576" rIns="36576" tIns="36576" bIns="36576">
+          <a:bodyPr wrap="square" lIns="36576" tIns="36576" rIns="36576" bIns="36576">
             <a:spAutoFit/>
           </a:bodyPr>
           <a:lstStyle/>
@@ -5823,7 +5870,7 @@
           <a:noFill/>
         </p:spPr>
         <p:txBody>
-          <a:bodyPr wrap="square" lIns="36576" rIns="36576" tIns="36576" bIns="36576">
+          <a:bodyPr wrap="square" lIns="36576" tIns="36576" rIns="36576" bIns="36576">
             <a:spAutoFit/>
           </a:bodyPr>
           <a:lstStyle/>
@@ -5889,6 +5936,7 @@
           <a:lstStyle/>
           <a:p>
             <a:pPr algn="ctr"/>
+            <a:endParaRPr/>
           </a:p>
         </p:txBody>
       </p:sp>
@@ -5932,6 +5980,7 @@
           <a:lstStyle/>
           <a:p>
             <a:pPr algn="ctr"/>
+            <a:endParaRPr/>
           </a:p>
         </p:txBody>
       </p:sp>
@@ -5952,7 +6001,7 @@
           <a:noFill/>
         </p:spPr>
         <p:txBody>
-          <a:bodyPr wrap="square" lIns="36576" rIns="36576" tIns="36576" bIns="36576">
+          <a:bodyPr wrap="square" lIns="36576" tIns="36576" rIns="36576" bIns="36576">
             <a:spAutoFit/>
           </a:bodyPr>
           <a:lstStyle/>
@@ -5991,7 +6040,7 @@
           <a:noFill/>
         </p:spPr>
         <p:txBody>
-          <a:bodyPr wrap="square" lIns="36576" rIns="36576" tIns="36576" bIns="36576">
+          <a:bodyPr wrap="square" lIns="36576" tIns="36576" rIns="36576" bIns="36576">
             <a:spAutoFit/>
           </a:bodyPr>
           <a:lstStyle/>
@@ -6032,7 +6081,7 @@
           <a:noFill/>
         </p:spPr>
         <p:txBody>
-          <a:bodyPr wrap="square" lIns="36576" rIns="36576" tIns="36576" bIns="36576">
+          <a:bodyPr wrap="square" lIns="36576" tIns="36576" rIns="36576" bIns="36576">
             <a:spAutoFit/>
           </a:bodyPr>
           <a:lstStyle/>
@@ -6071,7 +6120,7 @@
           <a:noFill/>
         </p:spPr>
         <p:txBody>
-          <a:bodyPr wrap="square" lIns="45720" rIns="45720" tIns="18288" bIns="18288">
+          <a:bodyPr wrap="square" lIns="45720" tIns="18288" rIns="45720" bIns="18288">
             <a:spAutoFit/>
           </a:bodyPr>
           <a:lstStyle/>
@@ -6158,7 +6207,7 @@
 </file>
 
 <file path=ppt/slides/slide13.xml><?xml version="1.0" encoding="utf-8"?>
-<p:sld xmlns:a="http://schemas.openxmlformats.org/drawingml/2006/main" xmlns:p="http://schemas.openxmlformats.org/presentationml/2006/main" xmlns:r="http://schemas.openxmlformats.org/officeDocument/2006/relationships">
+<p:sld xmlns:a="http://schemas.openxmlformats.org/drawingml/2006/main" xmlns:r="http://schemas.openxmlformats.org/officeDocument/2006/relationships" xmlns:p="http://schemas.openxmlformats.org/presentationml/2006/main">
   <p:cSld>
     <p:spTree>
       <p:nvGrpSpPr>
@@ -6166,7 +6215,14 @@
         <p:cNvGrpSpPr/>
         <p:nvPr/>
       </p:nvGrpSpPr>
-      <p:grpSpPr/>
+      <p:grpSpPr>
+        <a:xfrm>
+          <a:off x="0" y="0"/>
+          <a:ext cx="0" cy="0"/>
+          <a:chOff x="0" y="0"/>
+          <a:chExt cx="0" cy="0"/>
+        </a:xfrm>
+      </p:grpSpPr>
       <p:sp>
         <p:nvSpPr>
           <p:cNvPr id="2" name="TextBox 1"/>
@@ -6184,7 +6240,7 @@
           <a:noFill/>
         </p:spPr>
         <p:txBody>
-          <a:bodyPr wrap="square" lIns="36576" rIns="36576" tIns="36576" bIns="36576">
+          <a:bodyPr wrap="square" lIns="36576" tIns="36576" rIns="36576" bIns="36576">
             <a:spAutoFit/>
           </a:bodyPr>
           <a:lstStyle/>
@@ -6246,6 +6302,7 @@
           <a:lstStyle/>
           <a:p>
             <a:pPr algn="ctr"/>
+            <a:endParaRPr/>
           </a:p>
         </p:txBody>
       </p:sp>
@@ -6266,7 +6323,7 @@
           <a:noFill/>
         </p:spPr>
         <p:txBody>
-          <a:bodyPr wrap="square" lIns="36576" rIns="36576" tIns="36576" bIns="36576">
+          <a:bodyPr wrap="square" lIns="36576" tIns="36576" rIns="36576" bIns="36576">
             <a:spAutoFit/>
           </a:bodyPr>
           <a:lstStyle/>
@@ -6305,7 +6362,7 @@
           <a:noFill/>
         </p:spPr>
         <p:txBody>
-          <a:bodyPr wrap="square" lIns="36576" rIns="36576" tIns="36576" bIns="36576">
+          <a:bodyPr wrap="square" lIns="36576" tIns="36576" rIns="36576" bIns="36576">
             <a:spAutoFit/>
           </a:bodyPr>
           <a:lstStyle/>
@@ -6369,6 +6426,7 @@
           <a:lstStyle/>
           <a:p>
             <a:pPr algn="ctr"/>
+            <a:endParaRPr/>
           </a:p>
         </p:txBody>
       </p:sp>
@@ -6412,6 +6470,7 @@
           <a:lstStyle/>
           <a:p>
             <a:pPr algn="ctr"/>
+            <a:endParaRPr/>
           </a:p>
         </p:txBody>
       </p:sp>
@@ -6432,7 +6491,7 @@
           <a:noFill/>
         </p:spPr>
         <p:txBody>
-          <a:bodyPr wrap="square" lIns="36576" rIns="36576" tIns="36576" bIns="36576">
+          <a:bodyPr wrap="square" lIns="36576" tIns="36576" rIns="36576" bIns="36576">
             <a:spAutoFit/>
           </a:bodyPr>
           <a:lstStyle/>
@@ -6471,7 +6530,7 @@
           <a:noFill/>
         </p:spPr>
         <p:txBody>
-          <a:bodyPr wrap="square" lIns="36576" rIns="36576" tIns="36576" bIns="36576">
+          <a:bodyPr wrap="square" lIns="36576" tIns="36576" rIns="36576" bIns="36576">
             <a:spAutoFit/>
           </a:bodyPr>
           <a:lstStyle/>
@@ -6537,6 +6596,7 @@
           <a:lstStyle/>
           <a:p>
             <a:pPr algn="ctr"/>
+            <a:endParaRPr/>
           </a:p>
         </p:txBody>
       </p:sp>
@@ -6580,6 +6640,7 @@
           <a:lstStyle/>
           <a:p>
             <a:pPr algn="ctr"/>
+            <a:endParaRPr/>
           </a:p>
         </p:txBody>
       </p:sp>
@@ -6600,7 +6661,7 @@
           <a:noFill/>
         </p:spPr>
         <p:txBody>
-          <a:bodyPr wrap="square" lIns="36576" rIns="36576" tIns="36576" bIns="36576">
+          <a:bodyPr wrap="square" lIns="36576" tIns="36576" rIns="36576" bIns="36576">
             <a:spAutoFit/>
           </a:bodyPr>
           <a:lstStyle/>
@@ -6639,7 +6700,7 @@
           <a:noFill/>
         </p:spPr>
         <p:txBody>
-          <a:bodyPr wrap="square" lIns="36576" rIns="36576" tIns="36576" bIns="36576">
+          <a:bodyPr wrap="square" lIns="36576" tIns="36576" rIns="36576" bIns="36576">
             <a:spAutoFit/>
           </a:bodyPr>
           <a:lstStyle/>
@@ -6705,6 +6766,7 @@
           <a:lstStyle/>
           <a:p>
             <a:pPr algn="ctr"/>
+            <a:endParaRPr/>
           </a:p>
         </p:txBody>
       </p:sp>
@@ -6748,6 +6810,7 @@
           <a:lstStyle/>
           <a:p>
             <a:pPr algn="ctr"/>
+            <a:endParaRPr/>
           </a:p>
         </p:txBody>
       </p:sp>
@@ -6768,7 +6831,7 @@
           <a:noFill/>
         </p:spPr>
         <p:txBody>
-          <a:bodyPr wrap="square" lIns="36576" rIns="36576" tIns="36576" bIns="36576">
+          <a:bodyPr wrap="square" lIns="36576" tIns="36576" rIns="36576" bIns="36576">
             <a:spAutoFit/>
           </a:bodyPr>
           <a:lstStyle/>
@@ -6807,7 +6870,7 @@
           <a:noFill/>
         </p:spPr>
         <p:txBody>
-          <a:bodyPr wrap="square" lIns="36576" rIns="36576" tIns="36576" bIns="36576">
+          <a:bodyPr wrap="square" lIns="36576" tIns="36576" rIns="36576" bIns="36576">
             <a:spAutoFit/>
           </a:bodyPr>
           <a:lstStyle/>
@@ -6848,7 +6911,7 @@
           <a:noFill/>
         </p:spPr>
         <p:txBody>
-          <a:bodyPr wrap="square" lIns="36576" rIns="36576" tIns="36576" bIns="36576">
+          <a:bodyPr wrap="square" lIns="36576" tIns="36576" rIns="36576" bIns="36576">
             <a:spAutoFit/>
           </a:bodyPr>
           <a:lstStyle/>
@@ -6887,7 +6950,7 @@
           <a:noFill/>
         </p:spPr>
         <p:txBody>
-          <a:bodyPr wrap="square" lIns="45720" rIns="45720" tIns="18288" bIns="18288">
+          <a:bodyPr wrap="square" lIns="45720" tIns="18288" rIns="45720" bIns="18288">
             <a:spAutoFit/>
           </a:bodyPr>
           <a:lstStyle/>
@@ -6974,7 +7037,7 @@
 </file>
 
 <file path=ppt/slides/slide14.xml><?xml version="1.0" encoding="utf-8"?>
-<p:sld xmlns:a="http://schemas.openxmlformats.org/drawingml/2006/main" xmlns:p="http://schemas.openxmlformats.org/presentationml/2006/main" xmlns:r="http://schemas.openxmlformats.org/officeDocument/2006/relationships">
+<p:sld xmlns:a="http://schemas.openxmlformats.org/drawingml/2006/main" xmlns:r="http://schemas.openxmlformats.org/officeDocument/2006/relationships" xmlns:p="http://schemas.openxmlformats.org/presentationml/2006/main">
   <p:cSld>
     <p:spTree>
       <p:nvGrpSpPr>
@@ -6982,7 +7045,14 @@
         <p:cNvGrpSpPr/>
         <p:nvPr/>
       </p:nvGrpSpPr>
-      <p:grpSpPr/>
+      <p:grpSpPr>
+        <a:xfrm>
+          <a:off x="0" y="0"/>
+          <a:ext cx="0" cy="0"/>
+          <a:chOff x="0" y="0"/>
+          <a:chExt cx="0" cy="0"/>
+        </a:xfrm>
+      </p:grpSpPr>
       <p:sp>
         <p:nvSpPr>
           <p:cNvPr id="2" name="TextBox 1"/>
@@ -7000,7 +7070,7 @@
           <a:noFill/>
         </p:spPr>
         <p:txBody>
-          <a:bodyPr wrap="square" lIns="36576" rIns="36576" tIns="36576" bIns="36576">
+          <a:bodyPr wrap="square" lIns="36576" tIns="36576" rIns="36576" bIns="36576">
             <a:spAutoFit/>
           </a:bodyPr>
           <a:lstStyle/>
@@ -7062,6 +7132,7 @@
           <a:lstStyle/>
           <a:p>
             <a:pPr algn="ctr"/>
+            <a:endParaRPr/>
           </a:p>
         </p:txBody>
       </p:sp>
@@ -7082,7 +7153,7 @@
           <a:noFill/>
         </p:spPr>
         <p:txBody>
-          <a:bodyPr wrap="square" lIns="36576" rIns="36576" tIns="36576" bIns="36576">
+          <a:bodyPr wrap="square" lIns="36576" tIns="36576" rIns="36576" bIns="36576">
             <a:spAutoFit/>
           </a:bodyPr>
           <a:lstStyle/>
@@ -7121,7 +7192,7 @@
           <a:noFill/>
         </p:spPr>
         <p:txBody>
-          <a:bodyPr wrap="square" lIns="36576" rIns="36576" tIns="36576" bIns="36576">
+          <a:bodyPr wrap="square" lIns="36576" tIns="36576" rIns="36576" bIns="36576">
             <a:spAutoFit/>
           </a:bodyPr>
           <a:lstStyle/>
@@ -7185,6 +7256,7 @@
           <a:lstStyle/>
           <a:p>
             <a:pPr algn="ctr"/>
+            <a:endParaRPr/>
           </a:p>
         </p:txBody>
       </p:sp>
@@ -7228,6 +7300,7 @@
           <a:lstStyle/>
           <a:p>
             <a:pPr algn="ctr"/>
+            <a:endParaRPr/>
           </a:p>
         </p:txBody>
       </p:sp>
@@ -7248,7 +7321,7 @@
           <a:noFill/>
         </p:spPr>
         <p:txBody>
-          <a:bodyPr wrap="square" lIns="36576" rIns="36576" tIns="36576" bIns="36576">
+          <a:bodyPr wrap="square" lIns="36576" tIns="36576" rIns="36576" bIns="36576">
             <a:spAutoFit/>
           </a:bodyPr>
           <a:lstStyle/>
@@ -7287,7 +7360,7 @@
           <a:noFill/>
         </p:spPr>
         <p:txBody>
-          <a:bodyPr wrap="square" lIns="36576" rIns="36576" tIns="36576" bIns="36576">
+          <a:bodyPr wrap="square" lIns="36576" tIns="36576" rIns="36576" bIns="36576">
             <a:spAutoFit/>
           </a:bodyPr>
           <a:lstStyle/>
@@ -7351,6 +7424,7 @@
           <a:lstStyle/>
           <a:p>
             <a:pPr algn="ctr"/>
+            <a:endParaRPr/>
           </a:p>
         </p:txBody>
       </p:sp>
@@ -7394,6 +7468,7 @@
           <a:lstStyle/>
           <a:p>
             <a:pPr algn="ctr"/>
+            <a:endParaRPr/>
           </a:p>
         </p:txBody>
       </p:sp>
@@ -7414,7 +7489,7 @@
           <a:noFill/>
         </p:spPr>
         <p:txBody>
-          <a:bodyPr wrap="square" lIns="36576" rIns="36576" tIns="36576" bIns="36576">
+          <a:bodyPr wrap="square" lIns="36576" tIns="36576" rIns="36576" bIns="36576">
             <a:spAutoFit/>
           </a:bodyPr>
           <a:lstStyle/>
@@ -7453,7 +7528,7 @@
           <a:noFill/>
         </p:spPr>
         <p:txBody>
-          <a:bodyPr wrap="square" lIns="36576" rIns="36576" tIns="36576" bIns="36576">
+          <a:bodyPr wrap="square" lIns="36576" tIns="36576" rIns="36576" bIns="36576">
             <a:spAutoFit/>
           </a:bodyPr>
           <a:lstStyle/>
@@ -7517,6 +7592,7 @@
           <a:lstStyle/>
           <a:p>
             <a:pPr algn="ctr"/>
+            <a:endParaRPr/>
           </a:p>
         </p:txBody>
       </p:sp>
@@ -7560,6 +7636,7 @@
           <a:lstStyle/>
           <a:p>
             <a:pPr algn="ctr"/>
+            <a:endParaRPr/>
           </a:p>
         </p:txBody>
       </p:sp>
@@ -7580,7 +7657,7 @@
           <a:noFill/>
         </p:spPr>
         <p:txBody>
-          <a:bodyPr wrap="square" lIns="36576" rIns="36576" tIns="36576" bIns="36576">
+          <a:bodyPr wrap="square" lIns="36576" tIns="36576" rIns="36576" bIns="36576">
             <a:spAutoFit/>
           </a:bodyPr>
           <a:lstStyle/>
@@ -7619,7 +7696,7 @@
           <a:noFill/>
         </p:spPr>
         <p:txBody>
-          <a:bodyPr wrap="square" lIns="36576" rIns="36576" tIns="36576" bIns="36576">
+          <a:bodyPr wrap="square" lIns="36576" tIns="36576" rIns="36576" bIns="36576">
             <a:spAutoFit/>
           </a:bodyPr>
           <a:lstStyle/>
@@ -7658,7 +7735,7 @@
           <a:noFill/>
         </p:spPr>
         <p:txBody>
-          <a:bodyPr wrap="square" lIns="36576" rIns="36576" tIns="36576" bIns="36576">
+          <a:bodyPr wrap="square" lIns="36576" tIns="36576" rIns="36576" bIns="36576">
             <a:spAutoFit/>
           </a:bodyPr>
           <a:lstStyle/>
@@ -7697,7 +7774,7 @@
           <a:noFill/>
         </p:spPr>
         <p:txBody>
-          <a:bodyPr wrap="square" lIns="45720" rIns="45720" tIns="18288" bIns="18288">
+          <a:bodyPr wrap="square" lIns="45720" tIns="18288" rIns="45720" bIns="18288">
             <a:spAutoFit/>
           </a:bodyPr>
           <a:lstStyle/>
@@ -7784,7 +7861,7 @@
 </file>
 
 <file path=ppt/slides/slide15.xml><?xml version="1.0" encoding="utf-8"?>
-<p:sld xmlns:a="http://schemas.openxmlformats.org/drawingml/2006/main" xmlns:p="http://schemas.openxmlformats.org/presentationml/2006/main" xmlns:r="http://schemas.openxmlformats.org/officeDocument/2006/relationships">
+<p:sld xmlns:a="http://schemas.openxmlformats.org/drawingml/2006/main" xmlns:r="http://schemas.openxmlformats.org/officeDocument/2006/relationships" xmlns:p="http://schemas.openxmlformats.org/presentationml/2006/main">
   <p:cSld>
     <p:bg>
       <p:bgPr>
@@ -7800,7 +7877,14 @@
         <p:cNvGrpSpPr/>
         <p:nvPr/>
       </p:nvGrpSpPr>
-      <p:grpSpPr/>
+      <p:grpSpPr>
+        <a:xfrm>
+          <a:off x="0" y="0"/>
+          <a:ext cx="0" cy="0"/>
+          <a:chOff x="0" y="0"/>
+          <a:chExt cx="0" cy="0"/>
+        </a:xfrm>
+      </p:grpSpPr>
       <p:sp>
         <p:nvSpPr>
           <p:cNvPr id="2" name="TextBox 1"/>
@@ -7818,7 +7902,7 @@
           <a:noFill/>
         </p:spPr>
         <p:txBody>
-          <a:bodyPr wrap="square" lIns="36576" rIns="36576" tIns="36576" bIns="36576" anchor="t">
+          <a:bodyPr wrap="square" lIns="36576" tIns="36576" rIns="36576" bIns="36576" anchor="t">
             <a:spAutoFit/>
           </a:bodyPr>
           <a:lstStyle/>
@@ -7857,7 +7941,7 @@
           <a:noFill/>
         </p:spPr>
         <p:txBody>
-          <a:bodyPr wrap="square" lIns="36576" rIns="36576" tIns="36576" bIns="36576" anchor="t">
+          <a:bodyPr wrap="square" lIns="36576" tIns="36576" rIns="36576" bIns="36576" anchor="t">
             <a:spAutoFit/>
           </a:bodyPr>
           <a:lstStyle/>
@@ -7919,6 +8003,7 @@
           <a:lstStyle/>
           <a:p>
             <a:pPr algn="ctr"/>
+            <a:endParaRPr/>
           </a:p>
         </p:txBody>
       </p:sp>
@@ -7939,7 +8024,7 @@
           <a:noFill/>
         </p:spPr>
         <p:txBody>
-          <a:bodyPr wrap="square" lIns="36576" rIns="36576" tIns="36576" bIns="36576" anchor="t">
+          <a:bodyPr wrap="square" lIns="36576" tIns="36576" rIns="36576" bIns="36576" anchor="t">
             <a:spAutoFit/>
           </a:bodyPr>
           <a:lstStyle/>
@@ -7963,52 +8048,13 @@
       </p:sp>
       <p:sp>
         <p:nvSpPr>
-          <p:cNvPr id="6" name="TextBox 5"/>
-          <p:cNvSpPr txBox="1"/>
-          <p:nvPr/>
-        </p:nvSpPr>
-        <p:spPr>
-          <a:xfrm>
-            <a:off x="822960" y="1828800"/>
-            <a:ext cx="9875520" cy="640080"/>
-          </a:xfrm>
-          <a:prstGeom prst="rect">
-            <a:avLst/>
-          </a:prstGeom>
-          <a:noFill/>
-        </p:spPr>
-        <p:txBody>
-          <a:bodyPr wrap="square" lIns="36576" rIns="36576" tIns="36576" bIns="36576" anchor="t">
-            <a:spAutoFit/>
-          </a:bodyPr>
-          <a:lstStyle/>
-          <a:p>
-            <a:pPr algn="l">
-              <a:spcAft>
-                <a:spcPts val="0"/>
-              </a:spcAft>
-            </a:pPr>
-            <a:r>
-              <a:rPr sz="2500" b="1" i="0">
-                <a:solidFill>
-                  <a:srgbClr val="FFFFFF"/>
-                </a:solidFill>
-                <a:latin typeface="Aptos"/>
-              </a:rPr>
-              <a:t>Have a Java, React, microservices or cloud development requirement?</a:t>
-            </a:r>
-          </a:p>
-        </p:txBody>
-      </p:sp>
-      <p:sp>
-        <p:nvSpPr>
           <p:cNvPr id="7" name="TextBox 6"/>
           <p:cNvSpPr txBox="1"/>
           <p:nvPr/>
         </p:nvSpPr>
         <p:spPr>
           <a:xfrm>
-            <a:off x="841248" y="2633472"/>
+            <a:off x="841248" y="1433935"/>
             <a:ext cx="9601200" cy="685800"/>
           </a:xfrm>
           <a:prstGeom prst="rect">
@@ -8017,7 +8063,7 @@
           <a:noFill/>
         </p:spPr>
         <p:txBody>
-          <a:bodyPr wrap="square" lIns="36576" rIns="36576" tIns="36576" bIns="36576" anchor="t">
+          <a:bodyPr wrap="square" lIns="36576" tIns="36576" rIns="36576" bIns="36576" anchor="t">
             <a:spAutoFit/>
           </a:bodyPr>
           <a:lstStyle/>
@@ -8047,7 +8093,7 @@
         </p:nvSpPr>
         <p:spPr>
           <a:xfrm>
-            <a:off x="841248" y="3794760"/>
+            <a:off x="841248" y="2595223"/>
             <a:ext cx="5303520" cy="1051560"/>
           </a:xfrm>
           <a:prstGeom prst="roundRect">
@@ -8079,6 +8125,7 @@
           <a:lstStyle/>
           <a:p>
             <a:pPr algn="ctr"/>
+            <a:endParaRPr/>
           </a:p>
         </p:txBody>
       </p:sp>
@@ -8090,7 +8137,7 @@
         </p:nvSpPr>
         <p:spPr>
           <a:xfrm>
-            <a:off x="1078992" y="4005072"/>
+            <a:off x="1078992" y="2805535"/>
             <a:ext cx="4800600" cy="320040"/>
           </a:xfrm>
           <a:prstGeom prst="rect">
@@ -8099,7 +8146,7 @@
           <a:noFill/>
         </p:spPr>
         <p:txBody>
-          <a:bodyPr wrap="square" lIns="36576" rIns="36576" tIns="36576" bIns="36576" anchor="t">
+          <a:bodyPr wrap="square" lIns="36576" tIns="36576" rIns="36576" bIns="36576" anchor="t">
             <a:spAutoFit/>
           </a:bodyPr>
           <a:lstStyle/>
@@ -8129,7 +8176,7 @@
         </p:nvSpPr>
         <p:spPr>
           <a:xfrm>
-            <a:off x="1078992" y="4389120"/>
+            <a:off x="1078992" y="3189583"/>
             <a:ext cx="4800600" cy="256032"/>
           </a:xfrm>
           <a:prstGeom prst="rect">
@@ -8138,7 +8185,7 @@
           <a:noFill/>
         </p:spPr>
         <p:txBody>
-          <a:bodyPr wrap="square" lIns="36576" rIns="36576" tIns="36576" bIns="36576" anchor="t">
+          <a:bodyPr wrap="square" lIns="36576" tIns="36576" rIns="36576" bIns="36576" anchor="t">
             <a:spAutoFit/>
           </a:bodyPr>
           <a:lstStyle/>
@@ -8168,7 +8215,7 @@
         </p:nvSpPr>
         <p:spPr>
           <a:xfrm>
-            <a:off x="868680" y="5303520"/>
+            <a:off x="868680" y="3887673"/>
             <a:ext cx="6217920" cy="274320"/>
           </a:xfrm>
           <a:prstGeom prst="rect">
@@ -8177,7 +8224,7 @@
           <a:noFill/>
         </p:spPr>
         <p:txBody>
-          <a:bodyPr wrap="square" lIns="36576" rIns="36576" tIns="36576" bIns="36576" anchor="t">
+          <a:bodyPr wrap="square" lIns="36576" tIns="36576" rIns="36576" bIns="36576" anchor="t">
             <a:spAutoFit/>
           </a:bodyPr>
           <a:lstStyle/>
@@ -8188,52 +8235,13 @@
               </a:spcAft>
             </a:pPr>
             <a:r>
-              <a:rPr sz="1400" b="1" i="0">
+              <a:rPr sz="1400" b="1" i="0" dirty="0">
                 <a:solidFill>
                   <a:srgbClr val="28C6DC"/>
                 </a:solidFill>
                 <a:latin typeface="Aptos"/>
               </a:rPr>
               <a:t>Website: https://skynetixsystems.com/</a:t>
-            </a:r>
-          </a:p>
-        </p:txBody>
-      </p:sp>
-      <p:sp>
-        <p:nvSpPr>
-          <p:cNvPr id="12" name="TextBox 11"/>
-          <p:cNvSpPr txBox="1"/>
-          <p:nvPr/>
-        </p:nvSpPr>
-        <p:spPr>
-          <a:xfrm>
-            <a:off x="868680" y="5669280"/>
-            <a:ext cx="7772400" cy="274320"/>
-          </a:xfrm>
-          <a:prstGeom prst="rect">
-            <a:avLst/>
-          </a:prstGeom>
-          <a:noFill/>
-        </p:spPr>
-        <p:txBody>
-          <a:bodyPr wrap="square" lIns="36576" rIns="36576" tIns="36576" bIns="36576" anchor="t">
-            <a:spAutoFit/>
-          </a:bodyPr>
-          <a:lstStyle/>
-          <a:p>
-            <a:pPr algn="l">
-              <a:spcAft>
-                <a:spcPts val="0"/>
-              </a:spcAft>
-            </a:pPr>
-            <a:r>
-              <a:rPr sz="1200" b="0" i="0">
-                <a:solidFill>
-                  <a:srgbClr val="FFFFFF"/>
-                </a:solidFill>
-                <a:latin typeface="Aptos"/>
-              </a:rPr>
-              <a:t>Contact: [Add business email]  |  [Add phone number]</a:t>
             </a:r>
           </a:p>
         </p:txBody>
@@ -8255,7 +8263,7 @@
           <a:noFill/>
         </p:spPr>
         <p:txBody>
-          <a:bodyPr wrap="square" lIns="36576" rIns="36576" tIns="36576" bIns="36576" anchor="t">
+          <a:bodyPr wrap="square" lIns="36576" tIns="36576" rIns="36576" bIns="36576" anchor="t">
             <a:spAutoFit/>
           </a:bodyPr>
           <a:lstStyle/>
@@ -8309,7 +8317,7 @@
         </p:nvSpPr>
         <p:spPr>
           <a:xfrm>
-            <a:off x="658368" y="5166360"/>
+            <a:off x="658368" y="3622692"/>
             <a:ext cx="8046720" cy="320040"/>
           </a:xfrm>
           <a:prstGeom prst="rect">
@@ -8329,13 +8337,31 @@
               </a:spcAft>
             </a:pPr>
             <a:r>
-              <a:rPr sz="1200" b="1">
+              <a:rPr sz="1200" b="1" dirty="0">
                 <a:solidFill>
                   <a:srgbClr val="193052"/>
                 </a:solidFill>
                 <a:latin typeface="Aptos"/>
               </a:rPr>
-              <a:t>Group affiliation: SkyNetix Systems LLP is a subsidiary of Smart Software Service.</a:t>
+              <a:t>Group affiliation: </a:t>
+            </a:r>
+            <a:r>
+              <a:rPr sz="1200" b="1" dirty="0" err="1">
+                <a:solidFill>
+                  <a:srgbClr val="193052"/>
+                </a:solidFill>
+                <a:latin typeface="Aptos"/>
+              </a:rPr>
+              <a:t>SkyNetix</a:t>
+            </a:r>
+            <a:r>
+              <a:rPr sz="1200" b="1" dirty="0">
+                <a:solidFill>
+                  <a:srgbClr val="193052"/>
+                </a:solidFill>
+                <a:latin typeface="Aptos"/>
+              </a:rPr>
+              <a:t> Systems LLP is a subsidiary of Smart Software Service.</a:t>
             </a:r>
           </a:p>
         </p:txBody>
@@ -8348,7 +8374,7 @@
         </p:nvSpPr>
         <p:spPr>
           <a:xfrm>
-            <a:off x="658368" y="5486400"/>
+            <a:off x="658368" y="4070553"/>
             <a:ext cx="8046720" cy="274320"/>
           </a:xfrm>
           <a:prstGeom prst="rect">
@@ -8368,7 +8394,7 @@
               </a:spcAft>
             </a:pPr>
             <a:r>
-              <a:rPr sz="1100" b="0">
+              <a:rPr sz="1100" b="0" dirty="0">
                 <a:solidFill>
                   <a:srgbClr val="2469AA"/>
                 </a:solidFill>
@@ -8376,6 +8402,77 @@
               </a:rPr>
               <a:t>Parent company website: https://smartsoftwareservice.com/</a:t>
             </a:r>
+          </a:p>
+        </p:txBody>
+      </p:sp>
+      <p:sp>
+        <p:nvSpPr>
+          <p:cNvPr id="6" name="TextBox 5">
+            <a:extLst>
+              <a:ext uri="{FF2B5EF4-FFF2-40B4-BE49-F238E27FC236}">
+                <a16:creationId xmlns:a16="http://schemas.microsoft.com/office/drawing/2014/main" id="{9C1C3F08-B2D5-046D-94F2-5AE176542660}"/>
+              </a:ext>
+            </a:extLst>
+          </p:cNvPr>
+          <p:cNvSpPr txBox="1"/>
+          <p:nvPr/>
+        </p:nvSpPr>
+        <p:spPr>
+          <a:xfrm>
+            <a:off x="841248" y="4621161"/>
+            <a:ext cx="9631355" cy="923330"/>
+          </a:xfrm>
+          <a:prstGeom prst="rect">
+            <a:avLst/>
+          </a:prstGeom>
+          <a:noFill/>
+        </p:spPr>
+        <p:txBody>
+          <a:bodyPr wrap="none" rtlCol="0">
+            <a:spAutoFit/>
+          </a:bodyPr>
+          <a:lstStyle/>
+          <a:p>
+            <a:r>
+              <a:rPr lang="en-US" b="1" dirty="0"/>
+              <a:t>Office No. 102-D, First Floor, </a:t>
+            </a:r>
+            <a:r>
+              <a:rPr lang="en-US" b="1" dirty="0" err="1"/>
+              <a:t>Ganesham</a:t>
+            </a:r>
+            <a:r>
+              <a:rPr lang="en-US" b="1" dirty="0"/>
+              <a:t>-A Commercial, BRTS Road, </a:t>
+            </a:r>
+            <a:r>
+              <a:rPr lang="en-US" b="1" dirty="0" err="1"/>
+              <a:t>Pimpale</a:t>
+            </a:r>
+            <a:r>
+              <a:rPr lang="en-US" b="1" dirty="0"/>
+              <a:t> </a:t>
+            </a:r>
+            <a:r>
+              <a:rPr lang="en-US" b="1" dirty="0" err="1"/>
+              <a:t>Saudager</a:t>
+            </a:r>
+            <a:r>
+              <a:rPr lang="en-US" b="1" dirty="0"/>
+              <a:t>, Pune 411027</a:t>
+            </a:r>
+          </a:p>
+          <a:p>
+            <a:r>
+              <a:rPr lang="en-US" b="1" u="sng" dirty="0">
+                <a:hlinkClick r:id="rId3"/>
+              </a:rPr>
+              <a:t>Phone: 7028870087</a:t>
+            </a:r>
+            <a:endParaRPr lang="en-US" b="1" dirty="0"/>
+          </a:p>
+          <a:p>
+            <a:endParaRPr lang="en-US" dirty="0"/>
           </a:p>
         </p:txBody>
       </p:sp>
@@ -8388,7 +8485,7 @@
 </file>
 
 <file path=ppt/slides/slide2.xml><?xml version="1.0" encoding="utf-8"?>
-<p:sld xmlns:a="http://schemas.openxmlformats.org/drawingml/2006/main" xmlns:p="http://schemas.openxmlformats.org/presentationml/2006/main" xmlns:r="http://schemas.openxmlformats.org/officeDocument/2006/relationships">
+<p:sld xmlns:a="http://schemas.openxmlformats.org/drawingml/2006/main" xmlns:r="http://schemas.openxmlformats.org/officeDocument/2006/relationships" xmlns:p="http://schemas.openxmlformats.org/presentationml/2006/main">
   <p:cSld>
     <p:bg>
       <p:bgPr>
@@ -8404,7 +8501,14 @@
         <p:cNvGrpSpPr/>
         <p:nvPr/>
       </p:nvGrpSpPr>
-      <p:grpSpPr/>
+      <p:grpSpPr>
+        <a:xfrm>
+          <a:off x="0" y="0"/>
+          <a:ext cx="0" cy="0"/>
+          <a:chOff x="0" y="0"/>
+          <a:chExt cx="0" cy="0"/>
+        </a:xfrm>
+      </p:grpSpPr>
       <p:sp>
         <p:nvSpPr>
           <p:cNvPr id="2" name="TextBox 1"/>
@@ -8422,7 +8526,7 @@
           <a:noFill/>
         </p:spPr>
         <p:txBody>
-          <a:bodyPr wrap="square" lIns="36576" rIns="36576" tIns="36576" bIns="36576" anchor="t">
+          <a:bodyPr wrap="square" lIns="36576" tIns="36576" rIns="36576" bIns="36576" anchor="t">
             <a:spAutoFit/>
           </a:bodyPr>
           <a:lstStyle/>
@@ -8461,7 +8565,7 @@
           <a:noFill/>
         </p:spPr>
         <p:txBody>
-          <a:bodyPr wrap="square" lIns="36576" rIns="36576" tIns="36576" bIns="36576" anchor="t">
+          <a:bodyPr wrap="square" lIns="36576" tIns="36576" rIns="36576" bIns="36576" anchor="t">
             <a:spAutoFit/>
           </a:bodyPr>
           <a:lstStyle/>
@@ -8523,6 +8627,7 @@
           <a:lstStyle/>
           <a:p>
             <a:pPr algn="ctr"/>
+            <a:endParaRPr/>
           </a:p>
         </p:txBody>
       </p:sp>
@@ -8543,7 +8648,7 @@
           <a:noFill/>
         </p:spPr>
         <p:txBody>
-          <a:bodyPr wrap="square" lIns="36576" rIns="36576" tIns="36576" bIns="36576" anchor="t">
+          <a:bodyPr wrap="square" lIns="36576" tIns="36576" rIns="36576" bIns="36576" anchor="t">
             <a:spAutoFit/>
           </a:bodyPr>
           <a:lstStyle/>
@@ -8582,7 +8687,7 @@
           <a:noFill/>
         </p:spPr>
         <p:txBody>
-          <a:bodyPr wrap="square" lIns="36576" rIns="36576" tIns="36576" bIns="36576" anchor="t">
+          <a:bodyPr wrap="square" lIns="36576" tIns="36576" rIns="36576" bIns="36576" anchor="t">
             <a:spAutoFit/>
           </a:bodyPr>
           <a:lstStyle/>
@@ -8644,6 +8749,7 @@
           <a:lstStyle/>
           <a:p>
             <a:pPr algn="ctr"/>
+            <a:endParaRPr/>
           </a:p>
         </p:txBody>
       </p:sp>
@@ -8687,6 +8793,7 @@
           <a:lstStyle/>
           <a:p>
             <a:pPr algn="ctr"/>
+            <a:endParaRPr/>
           </a:p>
         </p:txBody>
       </p:sp>
@@ -8707,7 +8814,7 @@
           <a:noFill/>
         </p:spPr>
         <p:txBody>
-          <a:bodyPr wrap="square" lIns="36576" rIns="36576" tIns="36576" bIns="36576" anchor="t">
+          <a:bodyPr wrap="square" lIns="36576" tIns="36576" rIns="36576" bIns="36576" anchor="t">
             <a:spAutoFit/>
           </a:bodyPr>
           <a:lstStyle/>
@@ -8746,7 +8853,7 @@
           <a:noFill/>
         </p:spPr>
         <p:txBody>
-          <a:bodyPr wrap="square" lIns="36576" rIns="36576" tIns="36576" bIns="36576" anchor="t">
+          <a:bodyPr wrap="square" lIns="36576" tIns="36576" rIns="36576" bIns="36576" anchor="t">
             <a:spAutoFit/>
           </a:bodyPr>
           <a:lstStyle/>
@@ -8808,6 +8915,7 @@
           <a:lstStyle/>
           <a:p>
             <a:pPr algn="ctr"/>
+            <a:endParaRPr/>
           </a:p>
         </p:txBody>
       </p:sp>
@@ -8851,6 +8959,7 @@
           <a:lstStyle/>
           <a:p>
             <a:pPr algn="ctr"/>
+            <a:endParaRPr/>
           </a:p>
         </p:txBody>
       </p:sp>
@@ -8871,7 +8980,7 @@
           <a:noFill/>
         </p:spPr>
         <p:txBody>
-          <a:bodyPr wrap="square" lIns="36576" rIns="36576" tIns="36576" bIns="36576" anchor="t">
+          <a:bodyPr wrap="square" lIns="36576" tIns="36576" rIns="36576" bIns="36576" anchor="t">
             <a:spAutoFit/>
           </a:bodyPr>
           <a:lstStyle/>
@@ -8910,7 +9019,7 @@
           <a:noFill/>
         </p:spPr>
         <p:txBody>
-          <a:bodyPr wrap="square" lIns="36576" rIns="36576" tIns="36576" bIns="36576" anchor="t">
+          <a:bodyPr wrap="square" lIns="36576" tIns="36576" rIns="36576" bIns="36576" anchor="t">
             <a:spAutoFit/>
           </a:bodyPr>
           <a:lstStyle/>
@@ -8972,6 +9081,7 @@
           <a:lstStyle/>
           <a:p>
             <a:pPr algn="ctr"/>
+            <a:endParaRPr/>
           </a:p>
         </p:txBody>
       </p:sp>
@@ -9015,6 +9125,7 @@
           <a:lstStyle/>
           <a:p>
             <a:pPr algn="ctr"/>
+            <a:endParaRPr/>
           </a:p>
         </p:txBody>
       </p:sp>
@@ -9035,7 +9146,7 @@
           <a:noFill/>
         </p:spPr>
         <p:txBody>
-          <a:bodyPr wrap="square" lIns="36576" rIns="36576" tIns="36576" bIns="36576" anchor="t">
+          <a:bodyPr wrap="square" lIns="36576" tIns="36576" rIns="36576" bIns="36576" anchor="t">
             <a:spAutoFit/>
           </a:bodyPr>
           <a:lstStyle/>
@@ -9074,7 +9185,7 @@
           <a:noFill/>
         </p:spPr>
         <p:txBody>
-          <a:bodyPr wrap="square" lIns="36576" rIns="36576" tIns="36576" bIns="36576" anchor="t">
+          <a:bodyPr wrap="square" lIns="36576" tIns="36576" rIns="36576" bIns="36576" anchor="t">
             <a:spAutoFit/>
           </a:bodyPr>
           <a:lstStyle/>
@@ -9113,7 +9224,7 @@
           <a:noFill/>
         </p:spPr>
         <p:txBody>
-          <a:bodyPr wrap="square" lIns="36576" rIns="36576" tIns="36576" bIns="36576" anchor="t">
+          <a:bodyPr wrap="square" lIns="36576" tIns="36576" rIns="36576" bIns="36576" anchor="t">
             <a:spAutoFit/>
           </a:bodyPr>
           <a:lstStyle/>
@@ -9168,7 +9279,7 @@
 </file>
 
 <file path=ppt/slides/slide3.xml><?xml version="1.0" encoding="utf-8"?>
-<p:sld xmlns:a="http://schemas.openxmlformats.org/drawingml/2006/main" xmlns:p="http://schemas.openxmlformats.org/presentationml/2006/main" xmlns:r="http://schemas.openxmlformats.org/officeDocument/2006/relationships">
+<p:sld xmlns:a="http://schemas.openxmlformats.org/drawingml/2006/main" xmlns:r="http://schemas.openxmlformats.org/officeDocument/2006/relationships" xmlns:p="http://schemas.openxmlformats.org/presentationml/2006/main">
   <p:cSld>
     <p:bg>
       <p:bgPr>
@@ -9184,7 +9295,14 @@
         <p:cNvGrpSpPr/>
         <p:nvPr/>
       </p:nvGrpSpPr>
-      <p:grpSpPr/>
+      <p:grpSpPr>
+        <a:xfrm>
+          <a:off x="0" y="0"/>
+          <a:ext cx="0" cy="0"/>
+          <a:chOff x="0" y="0"/>
+          <a:chExt cx="0" cy="0"/>
+        </a:xfrm>
+      </p:grpSpPr>
       <p:sp>
         <p:nvSpPr>
           <p:cNvPr id="2" name="TextBox 1"/>
@@ -9202,7 +9320,7 @@
           <a:noFill/>
         </p:spPr>
         <p:txBody>
-          <a:bodyPr wrap="square" lIns="36576" rIns="36576" tIns="36576" bIns="36576" anchor="t">
+          <a:bodyPr wrap="square" lIns="36576" tIns="36576" rIns="36576" bIns="36576" anchor="t">
             <a:spAutoFit/>
           </a:bodyPr>
           <a:lstStyle/>
@@ -9241,7 +9359,7 @@
           <a:noFill/>
         </p:spPr>
         <p:txBody>
-          <a:bodyPr wrap="square" lIns="36576" rIns="36576" tIns="36576" bIns="36576" anchor="t">
+          <a:bodyPr wrap="square" lIns="36576" tIns="36576" rIns="36576" bIns="36576" anchor="t">
             <a:spAutoFit/>
           </a:bodyPr>
           <a:lstStyle/>
@@ -9303,6 +9421,7 @@
           <a:lstStyle/>
           <a:p>
             <a:pPr algn="ctr"/>
+            <a:endParaRPr/>
           </a:p>
         </p:txBody>
       </p:sp>
@@ -9323,7 +9442,7 @@
           <a:noFill/>
         </p:spPr>
         <p:txBody>
-          <a:bodyPr wrap="square" lIns="36576" rIns="36576" tIns="36576" bIns="36576" anchor="t">
+          <a:bodyPr wrap="square" lIns="36576" tIns="36576" rIns="36576" bIns="36576" anchor="t">
             <a:spAutoFit/>
           </a:bodyPr>
           <a:lstStyle/>
@@ -9385,6 +9504,7 @@
           <a:lstStyle/>
           <a:p>
             <a:pPr algn="ctr"/>
+            <a:endParaRPr/>
           </a:p>
         </p:txBody>
       </p:sp>
@@ -9428,6 +9548,7 @@
           <a:lstStyle/>
           <a:p>
             <a:pPr algn="ctr"/>
+            <a:endParaRPr/>
           </a:p>
         </p:txBody>
       </p:sp>
@@ -9448,7 +9569,7 @@
           <a:noFill/>
         </p:spPr>
         <p:txBody>
-          <a:bodyPr wrap="square" lIns="36576" rIns="36576" tIns="36576" bIns="36576" anchor="t">
+          <a:bodyPr wrap="square" lIns="36576" tIns="36576" rIns="36576" bIns="36576" anchor="t">
             <a:spAutoFit/>
           </a:bodyPr>
           <a:lstStyle/>
@@ -9487,7 +9608,7 @@
           <a:noFill/>
         </p:spPr>
         <p:txBody>
-          <a:bodyPr wrap="square" lIns="36576" rIns="36576" tIns="36576" bIns="36576" anchor="t">
+          <a:bodyPr wrap="square" lIns="36576" tIns="36576" rIns="36576" bIns="36576" anchor="t">
             <a:spAutoFit/>
           </a:bodyPr>
           <a:lstStyle/>
@@ -9551,6 +9672,7 @@
           <a:lstStyle/>
           <a:p>
             <a:pPr algn="ctr"/>
+            <a:endParaRPr/>
           </a:p>
         </p:txBody>
       </p:sp>
@@ -9594,6 +9716,7 @@
           <a:lstStyle/>
           <a:p>
             <a:pPr algn="ctr"/>
+            <a:endParaRPr/>
           </a:p>
         </p:txBody>
       </p:sp>
@@ -9614,7 +9737,7 @@
           <a:noFill/>
         </p:spPr>
         <p:txBody>
-          <a:bodyPr wrap="square" lIns="36576" rIns="36576" tIns="36576" bIns="36576" anchor="t">
+          <a:bodyPr wrap="square" lIns="36576" tIns="36576" rIns="36576" bIns="36576" anchor="t">
             <a:spAutoFit/>
           </a:bodyPr>
           <a:lstStyle/>
@@ -9653,7 +9776,7 @@
           <a:noFill/>
         </p:spPr>
         <p:txBody>
-          <a:bodyPr wrap="square" lIns="36576" rIns="36576" tIns="36576" bIns="36576" anchor="t">
+          <a:bodyPr wrap="square" lIns="36576" tIns="36576" rIns="36576" bIns="36576" anchor="t">
             <a:spAutoFit/>
           </a:bodyPr>
           <a:lstStyle/>
@@ -9717,6 +9840,7 @@
           <a:lstStyle/>
           <a:p>
             <a:pPr algn="ctr"/>
+            <a:endParaRPr/>
           </a:p>
         </p:txBody>
       </p:sp>
@@ -9760,6 +9884,7 @@
           <a:lstStyle/>
           <a:p>
             <a:pPr algn="ctr"/>
+            <a:endParaRPr/>
           </a:p>
         </p:txBody>
       </p:sp>
@@ -9780,7 +9905,7 @@
           <a:noFill/>
         </p:spPr>
         <p:txBody>
-          <a:bodyPr wrap="square" lIns="36576" rIns="36576" tIns="36576" bIns="36576" anchor="t">
+          <a:bodyPr wrap="square" lIns="36576" tIns="36576" rIns="36576" bIns="36576" anchor="t">
             <a:spAutoFit/>
           </a:bodyPr>
           <a:lstStyle/>
@@ -9819,7 +9944,7 @@
           <a:noFill/>
         </p:spPr>
         <p:txBody>
-          <a:bodyPr wrap="square" lIns="36576" rIns="36576" tIns="36576" bIns="36576" anchor="t">
+          <a:bodyPr wrap="square" lIns="36576" tIns="36576" rIns="36576" bIns="36576" anchor="t">
             <a:spAutoFit/>
           </a:bodyPr>
           <a:lstStyle/>
@@ -9883,6 +10008,7 @@
           <a:lstStyle/>
           <a:p>
             <a:pPr algn="ctr"/>
+            <a:endParaRPr/>
           </a:p>
         </p:txBody>
       </p:sp>
@@ -9926,6 +10052,7 @@
           <a:lstStyle/>
           <a:p>
             <a:pPr algn="ctr"/>
+            <a:endParaRPr/>
           </a:p>
         </p:txBody>
       </p:sp>
@@ -9946,7 +10073,7 @@
           <a:noFill/>
         </p:spPr>
         <p:txBody>
-          <a:bodyPr wrap="square" lIns="36576" rIns="36576" tIns="36576" bIns="36576" anchor="t">
+          <a:bodyPr wrap="square" lIns="36576" tIns="36576" rIns="36576" bIns="36576" anchor="t">
             <a:spAutoFit/>
           </a:bodyPr>
           <a:lstStyle/>
@@ -9985,7 +10112,7 @@
           <a:noFill/>
         </p:spPr>
         <p:txBody>
-          <a:bodyPr wrap="square" lIns="36576" rIns="36576" tIns="36576" bIns="36576" anchor="t">
+          <a:bodyPr wrap="square" lIns="36576" tIns="36576" rIns="36576" bIns="36576" anchor="t">
             <a:spAutoFit/>
           </a:bodyPr>
           <a:lstStyle/>
@@ -10047,6 +10174,7 @@
           <a:lstStyle/>
           <a:p>
             <a:pPr algn="ctr"/>
+            <a:endParaRPr/>
           </a:p>
         </p:txBody>
       </p:sp>
@@ -10090,6 +10218,7 @@
           <a:lstStyle/>
           <a:p>
             <a:pPr algn="ctr"/>
+            <a:endParaRPr/>
           </a:p>
         </p:txBody>
       </p:sp>
@@ -10110,7 +10239,7 @@
           <a:noFill/>
         </p:spPr>
         <p:txBody>
-          <a:bodyPr wrap="square" lIns="36576" rIns="36576" tIns="36576" bIns="36576" anchor="t">
+          <a:bodyPr wrap="square" lIns="36576" tIns="36576" rIns="36576" bIns="36576" anchor="t">
             <a:spAutoFit/>
           </a:bodyPr>
           <a:lstStyle/>
@@ -10149,7 +10278,7 @@
           <a:noFill/>
         </p:spPr>
         <p:txBody>
-          <a:bodyPr wrap="square" lIns="36576" rIns="36576" tIns="36576" bIns="36576" anchor="t">
+          <a:bodyPr wrap="square" lIns="36576" tIns="36576" rIns="36576" bIns="36576" anchor="t">
             <a:spAutoFit/>
           </a:bodyPr>
           <a:lstStyle/>
@@ -10188,7 +10317,7 @@
           <a:noFill/>
         </p:spPr>
         <p:txBody>
-          <a:bodyPr wrap="square" lIns="36576" rIns="36576" tIns="36576" bIns="36576" anchor="t">
+          <a:bodyPr wrap="square" lIns="36576" tIns="36576" rIns="36576" bIns="36576" anchor="t">
             <a:spAutoFit/>
           </a:bodyPr>
           <a:lstStyle/>
@@ -10243,7 +10372,7 @@
 </file>
 
 <file path=ppt/slides/slide4.xml><?xml version="1.0" encoding="utf-8"?>
-<p:sld xmlns:a="http://schemas.openxmlformats.org/drawingml/2006/main" xmlns:p="http://schemas.openxmlformats.org/presentationml/2006/main" xmlns:r="http://schemas.openxmlformats.org/officeDocument/2006/relationships">
+<p:sld xmlns:a="http://schemas.openxmlformats.org/drawingml/2006/main" xmlns:r="http://schemas.openxmlformats.org/officeDocument/2006/relationships" xmlns:p="http://schemas.openxmlformats.org/presentationml/2006/main">
   <p:cSld>
     <p:bg>
       <p:bgPr>
@@ -10259,7 +10388,14 @@
         <p:cNvGrpSpPr/>
         <p:nvPr/>
       </p:nvGrpSpPr>
-      <p:grpSpPr/>
+      <p:grpSpPr>
+        <a:xfrm>
+          <a:off x="0" y="0"/>
+          <a:ext cx="0" cy="0"/>
+          <a:chOff x="0" y="0"/>
+          <a:chExt cx="0" cy="0"/>
+        </a:xfrm>
+      </p:grpSpPr>
       <p:sp>
         <p:nvSpPr>
           <p:cNvPr id="2" name="TextBox 1"/>
@@ -10277,7 +10413,7 @@
           <a:noFill/>
         </p:spPr>
         <p:txBody>
-          <a:bodyPr wrap="square" lIns="36576" rIns="36576" tIns="36576" bIns="36576" anchor="t">
+          <a:bodyPr wrap="square" lIns="36576" tIns="36576" rIns="36576" bIns="36576" anchor="t">
             <a:spAutoFit/>
           </a:bodyPr>
           <a:lstStyle/>
@@ -10316,7 +10452,7 @@
           <a:noFill/>
         </p:spPr>
         <p:txBody>
-          <a:bodyPr wrap="square" lIns="36576" rIns="36576" tIns="36576" bIns="36576" anchor="t">
+          <a:bodyPr wrap="square" lIns="36576" tIns="36576" rIns="36576" bIns="36576" anchor="t">
             <a:spAutoFit/>
           </a:bodyPr>
           <a:lstStyle/>
@@ -10378,6 +10514,7 @@
           <a:lstStyle/>
           <a:p>
             <a:pPr algn="ctr"/>
+            <a:endParaRPr/>
           </a:p>
         </p:txBody>
       </p:sp>
@@ -10398,7 +10535,7 @@
           <a:noFill/>
         </p:spPr>
         <p:txBody>
-          <a:bodyPr wrap="square" lIns="36576" rIns="36576" tIns="36576" bIns="36576" anchor="t">
+          <a:bodyPr wrap="square" lIns="36576" tIns="36576" rIns="36576" bIns="36576" anchor="t">
             <a:spAutoFit/>
           </a:bodyPr>
           <a:lstStyle/>
@@ -10460,6 +10597,7 @@
           <a:lstStyle/>
           <a:p>
             <a:pPr algn="ctr"/>
+            <a:endParaRPr/>
           </a:p>
         </p:txBody>
       </p:sp>
@@ -10503,6 +10641,7 @@
           <a:lstStyle/>
           <a:p>
             <a:pPr algn="ctr"/>
+            <a:endParaRPr/>
           </a:p>
         </p:txBody>
       </p:sp>
@@ -10523,7 +10662,7 @@
           <a:noFill/>
         </p:spPr>
         <p:txBody>
-          <a:bodyPr wrap="square" lIns="36576" rIns="36576" tIns="36576" bIns="36576" anchor="t">
+          <a:bodyPr wrap="square" lIns="36576" tIns="36576" rIns="36576" bIns="36576" anchor="t">
             <a:spAutoFit/>
           </a:bodyPr>
           <a:lstStyle/>
@@ -10562,7 +10701,7 @@
           <a:noFill/>
         </p:spPr>
         <p:txBody>
-          <a:bodyPr wrap="square" lIns="36576" rIns="36576" tIns="36576" bIns="36576" anchor="t">
+          <a:bodyPr wrap="square" lIns="36576" tIns="36576" rIns="36576" bIns="36576" anchor="t">
             <a:spAutoFit/>
           </a:bodyPr>
           <a:lstStyle/>
@@ -10628,6 +10767,7 @@
           <a:lstStyle/>
           <a:p>
             <a:pPr algn="ctr"/>
+            <a:endParaRPr/>
           </a:p>
         </p:txBody>
       </p:sp>
@@ -10671,6 +10811,7 @@
           <a:lstStyle/>
           <a:p>
             <a:pPr algn="ctr"/>
+            <a:endParaRPr/>
           </a:p>
         </p:txBody>
       </p:sp>
@@ -10691,7 +10832,7 @@
           <a:noFill/>
         </p:spPr>
         <p:txBody>
-          <a:bodyPr wrap="square" lIns="36576" rIns="36576" tIns="36576" bIns="36576" anchor="t">
+          <a:bodyPr wrap="square" lIns="36576" tIns="36576" rIns="36576" bIns="36576" anchor="t">
             <a:spAutoFit/>
           </a:bodyPr>
           <a:lstStyle/>
@@ -10730,7 +10871,7 @@
           <a:noFill/>
         </p:spPr>
         <p:txBody>
-          <a:bodyPr wrap="square" lIns="36576" rIns="36576" tIns="36576" bIns="36576" anchor="t">
+          <a:bodyPr wrap="square" lIns="36576" tIns="36576" rIns="36576" bIns="36576" anchor="t">
             <a:spAutoFit/>
           </a:bodyPr>
           <a:lstStyle/>
@@ -10796,6 +10937,7 @@
           <a:lstStyle/>
           <a:p>
             <a:pPr algn="ctr"/>
+            <a:endParaRPr/>
           </a:p>
         </p:txBody>
       </p:sp>
@@ -10839,6 +10981,7 @@
           <a:lstStyle/>
           <a:p>
             <a:pPr algn="ctr"/>
+            <a:endParaRPr/>
           </a:p>
         </p:txBody>
       </p:sp>
@@ -10859,7 +11002,7 @@
           <a:noFill/>
         </p:spPr>
         <p:txBody>
-          <a:bodyPr wrap="square" lIns="36576" rIns="36576" tIns="36576" bIns="36576" anchor="t">
+          <a:bodyPr wrap="square" lIns="36576" tIns="36576" rIns="36576" bIns="36576" anchor="t">
             <a:spAutoFit/>
           </a:bodyPr>
           <a:lstStyle/>
@@ -10898,7 +11041,7 @@
           <a:noFill/>
         </p:spPr>
         <p:txBody>
-          <a:bodyPr wrap="square" lIns="36576" rIns="36576" tIns="36576" bIns="36576" anchor="t">
+          <a:bodyPr wrap="square" lIns="36576" tIns="36576" rIns="36576" bIns="36576" anchor="t">
             <a:spAutoFit/>
           </a:bodyPr>
           <a:lstStyle/>
@@ -10941,7 +11084,7 @@
           <a:noFill/>
         </p:spPr>
         <p:txBody>
-          <a:bodyPr wrap="square" lIns="36576" rIns="36576" tIns="36576" bIns="36576" anchor="t">
+          <a:bodyPr wrap="square" lIns="36576" tIns="36576" rIns="36576" bIns="36576" anchor="t">
             <a:spAutoFit/>
           </a:bodyPr>
           <a:lstStyle/>
@@ -10996,7 +11139,7 @@
 </file>
 
 <file path=ppt/slides/slide5.xml><?xml version="1.0" encoding="utf-8"?>
-<p:sld xmlns:a="http://schemas.openxmlformats.org/drawingml/2006/main" xmlns:p="http://schemas.openxmlformats.org/presentationml/2006/main" xmlns:r="http://schemas.openxmlformats.org/officeDocument/2006/relationships">
+<p:sld xmlns:a="http://schemas.openxmlformats.org/drawingml/2006/main" xmlns:r="http://schemas.openxmlformats.org/officeDocument/2006/relationships" xmlns:p="http://schemas.openxmlformats.org/presentationml/2006/main">
   <p:cSld>
     <p:bg>
       <p:bgPr>
@@ -11012,7 +11155,14 @@
         <p:cNvGrpSpPr/>
         <p:nvPr/>
       </p:nvGrpSpPr>
-      <p:grpSpPr/>
+      <p:grpSpPr>
+        <a:xfrm>
+          <a:off x="0" y="0"/>
+          <a:ext cx="0" cy="0"/>
+          <a:chOff x="0" y="0"/>
+          <a:chExt cx="0" cy="0"/>
+        </a:xfrm>
+      </p:grpSpPr>
       <p:sp>
         <p:nvSpPr>
           <p:cNvPr id="2" name="TextBox 1"/>
@@ -11030,7 +11180,7 @@
           <a:noFill/>
         </p:spPr>
         <p:txBody>
-          <a:bodyPr wrap="square" lIns="36576" rIns="36576" tIns="36576" bIns="36576" anchor="t">
+          <a:bodyPr wrap="square" lIns="36576" tIns="36576" rIns="36576" bIns="36576" anchor="t">
             <a:spAutoFit/>
           </a:bodyPr>
           <a:lstStyle/>
@@ -11069,7 +11219,7 @@
           <a:noFill/>
         </p:spPr>
         <p:txBody>
-          <a:bodyPr wrap="square" lIns="36576" rIns="36576" tIns="36576" bIns="36576" anchor="t">
+          <a:bodyPr wrap="square" lIns="36576" tIns="36576" rIns="36576" bIns="36576" anchor="t">
             <a:spAutoFit/>
           </a:bodyPr>
           <a:lstStyle/>
@@ -11131,6 +11281,7 @@
           <a:lstStyle/>
           <a:p>
             <a:pPr algn="ctr"/>
+            <a:endParaRPr/>
           </a:p>
         </p:txBody>
       </p:sp>
@@ -11151,7 +11302,7 @@
           <a:noFill/>
         </p:spPr>
         <p:txBody>
-          <a:bodyPr wrap="square" lIns="36576" rIns="36576" tIns="36576" bIns="36576" anchor="t">
+          <a:bodyPr wrap="square" lIns="36576" tIns="36576" rIns="36576" bIns="36576" anchor="t">
             <a:spAutoFit/>
           </a:bodyPr>
           <a:lstStyle/>
@@ -11213,6 +11364,7 @@
           <a:lstStyle/>
           <a:p>
             <a:pPr algn="ctr"/>
+            <a:endParaRPr/>
           </a:p>
         </p:txBody>
       </p:sp>
@@ -11256,6 +11408,7 @@
           <a:lstStyle/>
           <a:p>
             <a:pPr algn="ctr"/>
+            <a:endParaRPr/>
           </a:p>
         </p:txBody>
       </p:sp>
@@ -11276,7 +11429,7 @@
           <a:noFill/>
         </p:spPr>
         <p:txBody>
-          <a:bodyPr wrap="square" lIns="36576" rIns="36576" tIns="36576" bIns="36576" anchor="t">
+          <a:bodyPr wrap="square" lIns="36576" tIns="36576" rIns="36576" bIns="36576" anchor="t">
             <a:spAutoFit/>
           </a:bodyPr>
           <a:lstStyle/>
@@ -11315,7 +11468,7 @@
           <a:noFill/>
         </p:spPr>
         <p:txBody>
-          <a:bodyPr wrap="square" lIns="36576" rIns="36576" tIns="36576" bIns="36576" anchor="t">
+          <a:bodyPr wrap="square" lIns="36576" tIns="36576" rIns="36576" bIns="36576" anchor="t">
             <a:spAutoFit/>
           </a:bodyPr>
           <a:lstStyle/>
@@ -11354,7 +11507,7 @@
           <a:noFill/>
         </p:spPr>
         <p:txBody>
-          <a:bodyPr wrap="square" lIns="36576" rIns="36576" tIns="36576" bIns="36576" anchor="t">
+          <a:bodyPr wrap="square" lIns="36576" tIns="36576" rIns="36576" bIns="36576" anchor="t">
             <a:spAutoFit/>
           </a:bodyPr>
           <a:lstStyle/>
@@ -11393,7 +11546,7 @@
           <a:noFill/>
         </p:spPr>
         <p:txBody>
-          <a:bodyPr wrap="square" lIns="36576" rIns="36576" tIns="36576" bIns="36576" anchor="t">
+          <a:bodyPr wrap="square" lIns="36576" tIns="36576" rIns="36576" bIns="36576" anchor="t">
             <a:spAutoFit/>
           </a:bodyPr>
           <a:lstStyle/>
@@ -11455,6 +11608,7 @@
           <a:lstStyle/>
           <a:p>
             <a:pPr algn="ctr"/>
+            <a:endParaRPr/>
           </a:p>
         </p:txBody>
       </p:sp>
@@ -11498,6 +11652,7 @@
           <a:lstStyle/>
           <a:p>
             <a:pPr algn="ctr"/>
+            <a:endParaRPr/>
           </a:p>
         </p:txBody>
       </p:sp>
@@ -11518,7 +11673,7 @@
           <a:noFill/>
         </p:spPr>
         <p:txBody>
-          <a:bodyPr wrap="square" lIns="36576" rIns="36576" tIns="36576" bIns="36576" anchor="t">
+          <a:bodyPr wrap="square" lIns="36576" tIns="36576" rIns="36576" bIns="36576" anchor="t">
             <a:spAutoFit/>
           </a:bodyPr>
           <a:lstStyle/>
@@ -11557,7 +11712,7 @@
           <a:noFill/>
         </p:spPr>
         <p:txBody>
-          <a:bodyPr wrap="square" lIns="36576" rIns="36576" tIns="36576" bIns="36576" anchor="t">
+          <a:bodyPr wrap="square" lIns="36576" tIns="36576" rIns="36576" bIns="36576" anchor="t">
             <a:spAutoFit/>
           </a:bodyPr>
           <a:lstStyle/>
@@ -11596,7 +11751,7 @@
           <a:noFill/>
         </p:spPr>
         <p:txBody>
-          <a:bodyPr wrap="square" lIns="36576" rIns="36576" tIns="36576" bIns="36576" anchor="t">
+          <a:bodyPr wrap="square" lIns="36576" tIns="36576" rIns="36576" bIns="36576" anchor="t">
             <a:spAutoFit/>
           </a:bodyPr>
           <a:lstStyle/>
@@ -11635,7 +11790,7 @@
           <a:noFill/>
         </p:spPr>
         <p:txBody>
-          <a:bodyPr wrap="square" lIns="36576" rIns="36576" tIns="36576" bIns="36576" anchor="t">
+          <a:bodyPr wrap="square" lIns="36576" tIns="36576" rIns="36576" bIns="36576" anchor="t">
             <a:spAutoFit/>
           </a:bodyPr>
           <a:lstStyle/>
@@ -11697,6 +11852,7 @@
           <a:lstStyle/>
           <a:p>
             <a:pPr algn="ctr"/>
+            <a:endParaRPr/>
           </a:p>
         </p:txBody>
       </p:sp>
@@ -11740,6 +11896,7 @@
           <a:lstStyle/>
           <a:p>
             <a:pPr algn="ctr"/>
+            <a:endParaRPr/>
           </a:p>
         </p:txBody>
       </p:sp>
@@ -11760,7 +11917,7 @@
           <a:noFill/>
         </p:spPr>
         <p:txBody>
-          <a:bodyPr wrap="square" lIns="36576" rIns="36576" tIns="36576" bIns="36576" anchor="t">
+          <a:bodyPr wrap="square" lIns="36576" tIns="36576" rIns="36576" bIns="36576" anchor="t">
             <a:spAutoFit/>
           </a:bodyPr>
           <a:lstStyle/>
@@ -11799,7 +11956,7 @@
           <a:noFill/>
         </p:spPr>
         <p:txBody>
-          <a:bodyPr wrap="square" lIns="36576" rIns="36576" tIns="36576" bIns="36576" anchor="t">
+          <a:bodyPr wrap="square" lIns="36576" tIns="36576" rIns="36576" bIns="36576" anchor="t">
             <a:spAutoFit/>
           </a:bodyPr>
           <a:lstStyle/>
@@ -11838,7 +11995,7 @@
           <a:noFill/>
         </p:spPr>
         <p:txBody>
-          <a:bodyPr wrap="square" lIns="36576" rIns="36576" tIns="36576" bIns="36576" anchor="t">
+          <a:bodyPr wrap="square" lIns="36576" tIns="36576" rIns="36576" bIns="36576" anchor="t">
             <a:spAutoFit/>
           </a:bodyPr>
           <a:lstStyle/>
@@ -11877,7 +12034,7 @@
           <a:noFill/>
         </p:spPr>
         <p:txBody>
-          <a:bodyPr wrap="square" lIns="36576" rIns="36576" tIns="36576" bIns="36576" anchor="t">
+          <a:bodyPr wrap="square" lIns="36576" tIns="36576" rIns="36576" bIns="36576" anchor="t">
             <a:spAutoFit/>
           </a:bodyPr>
           <a:lstStyle/>
@@ -11939,6 +12096,7 @@
           <a:lstStyle/>
           <a:p>
             <a:pPr algn="ctr"/>
+            <a:endParaRPr/>
           </a:p>
         </p:txBody>
       </p:sp>
@@ -11982,6 +12140,7 @@
           <a:lstStyle/>
           <a:p>
             <a:pPr algn="ctr"/>
+            <a:endParaRPr/>
           </a:p>
         </p:txBody>
       </p:sp>
@@ -12002,7 +12161,7 @@
           <a:noFill/>
         </p:spPr>
         <p:txBody>
-          <a:bodyPr wrap="square" lIns="36576" rIns="36576" tIns="36576" bIns="36576" anchor="t">
+          <a:bodyPr wrap="square" lIns="36576" tIns="36576" rIns="36576" bIns="36576" anchor="t">
             <a:spAutoFit/>
           </a:bodyPr>
           <a:lstStyle/>
@@ -12041,7 +12200,7 @@
           <a:noFill/>
         </p:spPr>
         <p:txBody>
-          <a:bodyPr wrap="square" lIns="36576" rIns="36576" tIns="36576" bIns="36576" anchor="t">
+          <a:bodyPr wrap="square" lIns="36576" tIns="36576" rIns="36576" bIns="36576" anchor="t">
             <a:spAutoFit/>
           </a:bodyPr>
           <a:lstStyle/>
@@ -12080,7 +12239,7 @@
           <a:noFill/>
         </p:spPr>
         <p:txBody>
-          <a:bodyPr wrap="square" lIns="36576" rIns="36576" tIns="36576" bIns="36576" anchor="t">
+          <a:bodyPr wrap="square" lIns="36576" tIns="36576" rIns="36576" bIns="36576" anchor="t">
             <a:spAutoFit/>
           </a:bodyPr>
           <a:lstStyle/>
@@ -12119,7 +12278,7 @@
           <a:noFill/>
         </p:spPr>
         <p:txBody>
-          <a:bodyPr wrap="square" lIns="36576" rIns="36576" tIns="36576" bIns="36576" anchor="t">
+          <a:bodyPr wrap="square" lIns="36576" tIns="36576" rIns="36576" bIns="36576" anchor="t">
             <a:spAutoFit/>
           </a:bodyPr>
           <a:lstStyle/>
@@ -12181,6 +12340,7 @@
           <a:lstStyle/>
           <a:p>
             <a:pPr algn="ctr"/>
+            <a:endParaRPr/>
           </a:p>
         </p:txBody>
       </p:sp>
@@ -12224,6 +12384,7 @@
           <a:lstStyle/>
           <a:p>
             <a:pPr algn="ctr"/>
+            <a:endParaRPr/>
           </a:p>
         </p:txBody>
       </p:sp>
@@ -12244,7 +12405,7 @@
           <a:noFill/>
         </p:spPr>
         <p:txBody>
-          <a:bodyPr wrap="square" lIns="36576" rIns="36576" tIns="36576" bIns="36576" anchor="t">
+          <a:bodyPr wrap="square" lIns="36576" tIns="36576" rIns="36576" bIns="36576" anchor="t">
             <a:spAutoFit/>
           </a:bodyPr>
           <a:lstStyle/>
@@ -12283,7 +12444,7 @@
           <a:noFill/>
         </p:spPr>
         <p:txBody>
-          <a:bodyPr wrap="square" lIns="36576" rIns="36576" tIns="36576" bIns="36576" anchor="t">
+          <a:bodyPr wrap="square" lIns="36576" tIns="36576" rIns="36576" bIns="36576" anchor="t">
             <a:spAutoFit/>
           </a:bodyPr>
           <a:lstStyle/>
@@ -12322,7 +12483,7 @@
           <a:noFill/>
         </p:spPr>
         <p:txBody>
-          <a:bodyPr wrap="square" lIns="36576" rIns="36576" tIns="36576" bIns="36576" anchor="t">
+          <a:bodyPr wrap="square" lIns="36576" tIns="36576" rIns="36576" bIns="36576" anchor="t">
             <a:spAutoFit/>
           </a:bodyPr>
           <a:lstStyle/>
@@ -12384,6 +12545,7 @@
           <a:lstStyle/>
           <a:p>
             <a:pPr algn="ctr"/>
+            <a:endParaRPr/>
           </a:p>
         </p:txBody>
       </p:sp>
@@ -12404,7 +12566,7 @@
           <a:noFill/>
         </p:spPr>
         <p:txBody>
-          <a:bodyPr wrap="square" lIns="36576" rIns="36576" tIns="36576" bIns="36576" anchor="t">
+          <a:bodyPr wrap="square" lIns="36576" tIns="36576" rIns="36576" bIns="36576" anchor="t">
             <a:spAutoFit/>
           </a:bodyPr>
           <a:lstStyle/>
@@ -12459,7 +12621,7 @@
 </file>
 
 <file path=ppt/slides/slide6.xml><?xml version="1.0" encoding="utf-8"?>
-<p:sld xmlns:a="http://schemas.openxmlformats.org/drawingml/2006/main" xmlns:p="http://schemas.openxmlformats.org/presentationml/2006/main" xmlns:r="http://schemas.openxmlformats.org/officeDocument/2006/relationships">
+<p:sld xmlns:a="http://schemas.openxmlformats.org/drawingml/2006/main" xmlns:r="http://schemas.openxmlformats.org/officeDocument/2006/relationships" xmlns:p="http://schemas.openxmlformats.org/presentationml/2006/main">
   <p:cSld>
     <p:bg>
       <p:bgPr>
@@ -12475,7 +12637,14 @@
         <p:cNvGrpSpPr/>
         <p:nvPr/>
       </p:nvGrpSpPr>
-      <p:grpSpPr/>
+      <p:grpSpPr>
+        <a:xfrm>
+          <a:off x="0" y="0"/>
+          <a:ext cx="0" cy="0"/>
+          <a:chOff x="0" y="0"/>
+          <a:chExt cx="0" cy="0"/>
+        </a:xfrm>
+      </p:grpSpPr>
       <p:sp>
         <p:nvSpPr>
           <p:cNvPr id="2" name="TextBox 1"/>
@@ -12493,7 +12662,7 @@
           <a:noFill/>
         </p:spPr>
         <p:txBody>
-          <a:bodyPr wrap="square" lIns="36576" rIns="36576" tIns="36576" bIns="36576" anchor="t">
+          <a:bodyPr wrap="square" lIns="36576" tIns="36576" rIns="36576" bIns="36576" anchor="t">
             <a:spAutoFit/>
           </a:bodyPr>
           <a:lstStyle/>
@@ -12532,7 +12701,7 @@
           <a:noFill/>
         </p:spPr>
         <p:txBody>
-          <a:bodyPr wrap="square" lIns="36576" rIns="36576" tIns="36576" bIns="36576" anchor="t">
+          <a:bodyPr wrap="square" lIns="36576" tIns="36576" rIns="36576" bIns="36576" anchor="t">
             <a:spAutoFit/>
           </a:bodyPr>
           <a:lstStyle/>
@@ -12594,6 +12763,7 @@
           <a:lstStyle/>
           <a:p>
             <a:pPr algn="ctr"/>
+            <a:endParaRPr/>
           </a:p>
         </p:txBody>
       </p:sp>
@@ -12614,7 +12784,7 @@
           <a:noFill/>
         </p:spPr>
         <p:txBody>
-          <a:bodyPr wrap="square" lIns="36576" rIns="36576" tIns="36576" bIns="36576" anchor="t">
+          <a:bodyPr wrap="square" lIns="36576" tIns="36576" rIns="36576" bIns="36576" anchor="t">
             <a:spAutoFit/>
           </a:bodyPr>
           <a:lstStyle/>
@@ -12676,6 +12846,7 @@
           <a:lstStyle/>
           <a:p>
             <a:pPr algn="ctr"/>
+            <a:endParaRPr/>
           </a:p>
         </p:txBody>
       </p:sp>
@@ -12719,6 +12890,7 @@
           <a:lstStyle/>
           <a:p>
             <a:pPr algn="ctr"/>
+            <a:endParaRPr/>
           </a:p>
         </p:txBody>
       </p:sp>
@@ -12739,7 +12911,7 @@
           <a:noFill/>
         </p:spPr>
         <p:txBody>
-          <a:bodyPr wrap="square" lIns="36576" rIns="36576" tIns="36576" bIns="36576" anchor="t">
+          <a:bodyPr wrap="square" lIns="36576" tIns="36576" rIns="36576" bIns="36576" anchor="t">
             <a:spAutoFit/>
           </a:bodyPr>
           <a:lstStyle/>
@@ -12778,7 +12950,7 @@
           <a:noFill/>
         </p:spPr>
         <p:txBody>
-          <a:bodyPr wrap="square" lIns="36576" rIns="36576" tIns="36576" bIns="36576" anchor="t">
+          <a:bodyPr wrap="square" lIns="36576" tIns="36576" rIns="36576" bIns="36576" anchor="t">
             <a:spAutoFit/>
           </a:bodyPr>
           <a:lstStyle/>
@@ -12840,6 +13012,7 @@
           <a:lstStyle/>
           <a:p>
             <a:pPr algn="ctr"/>
+            <a:endParaRPr/>
           </a:p>
         </p:txBody>
       </p:sp>
@@ -12883,6 +13056,7 @@
           <a:lstStyle/>
           <a:p>
             <a:pPr algn="ctr"/>
+            <a:endParaRPr/>
           </a:p>
         </p:txBody>
       </p:sp>
@@ -12903,7 +13077,7 @@
           <a:noFill/>
         </p:spPr>
         <p:txBody>
-          <a:bodyPr wrap="square" lIns="36576" rIns="36576" tIns="36576" bIns="36576" anchor="t">
+          <a:bodyPr wrap="square" lIns="36576" tIns="36576" rIns="36576" bIns="36576" anchor="t">
             <a:spAutoFit/>
           </a:bodyPr>
           <a:lstStyle/>
@@ -12942,7 +13116,7 @@
           <a:noFill/>
         </p:spPr>
         <p:txBody>
-          <a:bodyPr wrap="square" lIns="36576" rIns="36576" tIns="36576" bIns="36576" anchor="t">
+          <a:bodyPr wrap="square" lIns="36576" tIns="36576" rIns="36576" bIns="36576" anchor="t">
             <a:spAutoFit/>
           </a:bodyPr>
           <a:lstStyle/>
@@ -13004,6 +13178,7 @@
           <a:lstStyle/>
           <a:p>
             <a:pPr algn="ctr"/>
+            <a:endParaRPr/>
           </a:p>
         </p:txBody>
       </p:sp>
@@ -13047,6 +13222,7 @@
           <a:lstStyle/>
           <a:p>
             <a:pPr algn="ctr"/>
+            <a:endParaRPr/>
           </a:p>
         </p:txBody>
       </p:sp>
@@ -13067,7 +13243,7 @@
           <a:noFill/>
         </p:spPr>
         <p:txBody>
-          <a:bodyPr wrap="square" lIns="36576" rIns="36576" tIns="36576" bIns="36576" anchor="t">
+          <a:bodyPr wrap="square" lIns="36576" tIns="36576" rIns="36576" bIns="36576" anchor="t">
             <a:spAutoFit/>
           </a:bodyPr>
           <a:lstStyle/>
@@ -13106,7 +13282,7 @@
           <a:noFill/>
         </p:spPr>
         <p:txBody>
-          <a:bodyPr wrap="square" lIns="36576" rIns="36576" tIns="36576" bIns="36576" anchor="t">
+          <a:bodyPr wrap="square" lIns="36576" tIns="36576" rIns="36576" bIns="36576" anchor="t">
             <a:spAutoFit/>
           </a:bodyPr>
           <a:lstStyle/>
@@ -13168,6 +13344,7 @@
           <a:lstStyle/>
           <a:p>
             <a:pPr algn="ctr"/>
+            <a:endParaRPr/>
           </a:p>
         </p:txBody>
       </p:sp>
@@ -13211,6 +13388,7 @@
           <a:lstStyle/>
           <a:p>
             <a:pPr algn="ctr"/>
+            <a:endParaRPr/>
           </a:p>
         </p:txBody>
       </p:sp>
@@ -13231,7 +13409,7 @@
           <a:noFill/>
         </p:spPr>
         <p:txBody>
-          <a:bodyPr wrap="square" lIns="36576" rIns="36576" tIns="36576" bIns="36576" anchor="t">
+          <a:bodyPr wrap="square" lIns="36576" tIns="36576" rIns="36576" bIns="36576" anchor="t">
             <a:spAutoFit/>
           </a:bodyPr>
           <a:lstStyle/>
@@ -13270,7 +13448,7 @@
           <a:noFill/>
         </p:spPr>
         <p:txBody>
-          <a:bodyPr wrap="square" lIns="36576" rIns="36576" tIns="36576" bIns="36576" anchor="t">
+          <a:bodyPr wrap="square" lIns="36576" tIns="36576" rIns="36576" bIns="36576" anchor="t">
             <a:spAutoFit/>
           </a:bodyPr>
           <a:lstStyle/>
@@ -13332,6 +13510,7 @@
           <a:lstStyle/>
           <a:p>
             <a:pPr algn="ctr"/>
+            <a:endParaRPr/>
           </a:p>
         </p:txBody>
       </p:sp>
@@ -13375,6 +13554,7 @@
           <a:lstStyle/>
           <a:p>
             <a:pPr algn="ctr"/>
+            <a:endParaRPr/>
           </a:p>
         </p:txBody>
       </p:sp>
@@ -13395,7 +13575,7 @@
           <a:noFill/>
         </p:spPr>
         <p:txBody>
-          <a:bodyPr wrap="square" lIns="36576" rIns="36576" tIns="36576" bIns="36576" anchor="t">
+          <a:bodyPr wrap="square" lIns="36576" tIns="36576" rIns="36576" bIns="36576" anchor="t">
             <a:spAutoFit/>
           </a:bodyPr>
           <a:lstStyle/>
@@ -13434,7 +13614,7 @@
           <a:noFill/>
         </p:spPr>
         <p:txBody>
-          <a:bodyPr wrap="square" lIns="36576" rIns="36576" tIns="36576" bIns="36576" anchor="t">
+          <a:bodyPr wrap="square" lIns="36576" tIns="36576" rIns="36576" bIns="36576" anchor="t">
             <a:spAutoFit/>
           </a:bodyPr>
           <a:lstStyle/>
@@ -13496,6 +13676,7 @@
           <a:lstStyle/>
           <a:p>
             <a:pPr algn="ctr"/>
+            <a:endParaRPr/>
           </a:p>
         </p:txBody>
       </p:sp>
@@ -13539,6 +13720,7 @@
           <a:lstStyle/>
           <a:p>
             <a:pPr algn="ctr"/>
+            <a:endParaRPr/>
           </a:p>
         </p:txBody>
       </p:sp>
@@ -13559,7 +13741,7 @@
           <a:noFill/>
         </p:spPr>
         <p:txBody>
-          <a:bodyPr wrap="square" lIns="36576" rIns="36576" tIns="36576" bIns="36576" anchor="t">
+          <a:bodyPr wrap="square" lIns="36576" tIns="36576" rIns="36576" bIns="36576" anchor="t">
             <a:spAutoFit/>
           </a:bodyPr>
           <a:lstStyle/>
@@ -13598,7 +13780,7 @@
           <a:noFill/>
         </p:spPr>
         <p:txBody>
-          <a:bodyPr wrap="square" lIns="36576" rIns="36576" tIns="36576" bIns="36576" anchor="t">
+          <a:bodyPr wrap="square" lIns="36576" tIns="36576" rIns="36576" bIns="36576" anchor="t">
             <a:spAutoFit/>
           </a:bodyPr>
           <a:lstStyle/>
@@ -13653,7 +13835,7 @@
 </file>
 
 <file path=ppt/slides/slide7.xml><?xml version="1.0" encoding="utf-8"?>
-<p:sld xmlns:a="http://schemas.openxmlformats.org/drawingml/2006/main" xmlns:p="http://schemas.openxmlformats.org/presentationml/2006/main" xmlns:r="http://schemas.openxmlformats.org/officeDocument/2006/relationships">
+<p:sld xmlns:a="http://schemas.openxmlformats.org/drawingml/2006/main" xmlns:r="http://schemas.openxmlformats.org/officeDocument/2006/relationships" xmlns:p="http://schemas.openxmlformats.org/presentationml/2006/main">
   <p:cSld>
     <p:bg>
       <p:bgPr>
@@ -13669,7 +13851,14 @@
         <p:cNvGrpSpPr/>
         <p:nvPr/>
       </p:nvGrpSpPr>
-      <p:grpSpPr/>
+      <p:grpSpPr>
+        <a:xfrm>
+          <a:off x="0" y="0"/>
+          <a:ext cx="0" cy="0"/>
+          <a:chOff x="0" y="0"/>
+          <a:chExt cx="0" cy="0"/>
+        </a:xfrm>
+      </p:grpSpPr>
       <p:sp>
         <p:nvSpPr>
           <p:cNvPr id="2" name="TextBox 1"/>
@@ -13687,7 +13876,7 @@
           <a:noFill/>
         </p:spPr>
         <p:txBody>
-          <a:bodyPr wrap="square" lIns="36576" rIns="36576" tIns="36576" bIns="36576" anchor="t">
+          <a:bodyPr wrap="square" lIns="36576" tIns="36576" rIns="36576" bIns="36576" anchor="t">
             <a:spAutoFit/>
           </a:bodyPr>
           <a:lstStyle/>
@@ -13726,7 +13915,7 @@
           <a:noFill/>
         </p:spPr>
         <p:txBody>
-          <a:bodyPr wrap="square" lIns="36576" rIns="36576" tIns="36576" bIns="36576" anchor="t">
+          <a:bodyPr wrap="square" lIns="36576" tIns="36576" rIns="36576" bIns="36576" anchor="t">
             <a:spAutoFit/>
           </a:bodyPr>
           <a:lstStyle/>
@@ -13788,6 +13977,7 @@
           <a:lstStyle/>
           <a:p>
             <a:pPr algn="ctr"/>
+            <a:endParaRPr/>
           </a:p>
         </p:txBody>
       </p:sp>
@@ -13808,7 +13998,7 @@
           <a:noFill/>
         </p:spPr>
         <p:txBody>
-          <a:bodyPr wrap="square" lIns="36576" rIns="36576" tIns="36576" bIns="36576" anchor="t">
+          <a:bodyPr wrap="square" lIns="36576" tIns="36576" rIns="36576" bIns="36576" anchor="t">
             <a:spAutoFit/>
           </a:bodyPr>
           <a:lstStyle/>
@@ -13870,6 +14060,7 @@
           <a:lstStyle/>
           <a:p>
             <a:pPr algn="ctr"/>
+            <a:endParaRPr/>
           </a:p>
         </p:txBody>
       </p:sp>
@@ -13913,6 +14104,7 @@
           <a:lstStyle/>
           <a:p>
             <a:pPr algn="ctr"/>
+            <a:endParaRPr/>
           </a:p>
         </p:txBody>
       </p:sp>
@@ -13933,7 +14125,7 @@
           <a:noFill/>
         </p:spPr>
         <p:txBody>
-          <a:bodyPr wrap="square" lIns="36576" rIns="36576" tIns="36576" bIns="36576" anchor="t">
+          <a:bodyPr wrap="square" lIns="36576" tIns="36576" rIns="36576" bIns="36576" anchor="t">
             <a:spAutoFit/>
           </a:bodyPr>
           <a:lstStyle/>
@@ -13972,7 +14164,7 @@
           <a:noFill/>
         </p:spPr>
         <p:txBody>
-          <a:bodyPr wrap="square" lIns="36576" rIns="36576" tIns="36576" bIns="36576" anchor="t">
+          <a:bodyPr wrap="square" lIns="36576" tIns="36576" rIns="36576" bIns="36576" anchor="t">
             <a:spAutoFit/>
           </a:bodyPr>
           <a:lstStyle/>
@@ -14038,6 +14230,7 @@
           <a:lstStyle/>
           <a:p>
             <a:pPr algn="ctr"/>
+            <a:endParaRPr/>
           </a:p>
         </p:txBody>
       </p:sp>
@@ -14081,6 +14274,7 @@
           <a:lstStyle/>
           <a:p>
             <a:pPr algn="ctr"/>
+            <a:endParaRPr/>
           </a:p>
         </p:txBody>
       </p:sp>
@@ -14101,7 +14295,7 @@
           <a:noFill/>
         </p:spPr>
         <p:txBody>
-          <a:bodyPr wrap="square" lIns="36576" rIns="36576" tIns="36576" bIns="36576" anchor="t">
+          <a:bodyPr wrap="square" lIns="36576" tIns="36576" rIns="36576" bIns="36576" anchor="t">
             <a:spAutoFit/>
           </a:bodyPr>
           <a:lstStyle/>
@@ -14140,7 +14334,7 @@
           <a:noFill/>
         </p:spPr>
         <p:txBody>
-          <a:bodyPr wrap="square" lIns="36576" rIns="36576" tIns="36576" bIns="36576" anchor="t">
+          <a:bodyPr wrap="square" lIns="36576" tIns="36576" rIns="36576" bIns="36576" anchor="t">
             <a:spAutoFit/>
           </a:bodyPr>
           <a:lstStyle/>
@@ -14183,7 +14377,7 @@
           <a:noFill/>
         </p:spPr>
         <p:txBody>
-          <a:bodyPr wrap="square" lIns="36576" rIns="36576" tIns="36576" bIns="36576" anchor="t">
+          <a:bodyPr wrap="square" lIns="36576" tIns="36576" rIns="36576" bIns="36576" anchor="t">
             <a:spAutoFit/>
           </a:bodyPr>
           <a:lstStyle/>
@@ -14238,7 +14432,7 @@
 </file>
 
 <file path=ppt/slides/slide8.xml><?xml version="1.0" encoding="utf-8"?>
-<p:sld xmlns:a="http://schemas.openxmlformats.org/drawingml/2006/main" xmlns:p="http://schemas.openxmlformats.org/presentationml/2006/main" xmlns:r="http://schemas.openxmlformats.org/officeDocument/2006/relationships">
+<p:sld xmlns:a="http://schemas.openxmlformats.org/drawingml/2006/main" xmlns:r="http://schemas.openxmlformats.org/officeDocument/2006/relationships" xmlns:p="http://schemas.openxmlformats.org/presentationml/2006/main">
   <p:cSld>
     <p:spTree>
       <p:nvGrpSpPr>
@@ -14246,7 +14440,14 @@
         <p:cNvGrpSpPr/>
         <p:nvPr/>
       </p:nvGrpSpPr>
-      <p:grpSpPr/>
+      <p:grpSpPr>
+        <a:xfrm>
+          <a:off x="0" y="0"/>
+          <a:ext cx="0" cy="0"/>
+          <a:chOff x="0" y="0"/>
+          <a:chExt cx="0" cy="0"/>
+        </a:xfrm>
+      </p:grpSpPr>
       <p:sp>
         <p:nvSpPr>
           <p:cNvPr id="2" name="TextBox 1"/>
@@ -14264,7 +14465,7 @@
           <a:noFill/>
         </p:spPr>
         <p:txBody>
-          <a:bodyPr wrap="square" lIns="36576" rIns="36576" tIns="36576" bIns="36576">
+          <a:bodyPr wrap="square" lIns="36576" tIns="36576" rIns="36576" bIns="36576">
             <a:spAutoFit/>
           </a:bodyPr>
           <a:lstStyle/>
@@ -14326,6 +14527,7 @@
           <a:lstStyle/>
           <a:p>
             <a:pPr algn="ctr"/>
+            <a:endParaRPr/>
           </a:p>
         </p:txBody>
       </p:sp>
@@ -14346,7 +14548,7 @@
           <a:noFill/>
         </p:spPr>
         <p:txBody>
-          <a:bodyPr wrap="square" lIns="36576" rIns="36576" tIns="36576" bIns="36576">
+          <a:bodyPr wrap="square" lIns="36576" tIns="36576" rIns="36576" bIns="36576">
             <a:spAutoFit/>
           </a:bodyPr>
           <a:lstStyle/>
@@ -14385,7 +14587,7 @@
           <a:noFill/>
         </p:spPr>
         <p:txBody>
-          <a:bodyPr wrap="square" lIns="36576" rIns="36576" tIns="36576" bIns="36576">
+          <a:bodyPr wrap="square" lIns="36576" tIns="36576" rIns="36576" bIns="36576">
             <a:spAutoFit/>
           </a:bodyPr>
           <a:lstStyle/>
@@ -14449,6 +14651,7 @@
           <a:lstStyle/>
           <a:p>
             <a:pPr algn="ctr"/>
+            <a:endParaRPr/>
           </a:p>
         </p:txBody>
       </p:sp>
@@ -14492,6 +14695,7 @@
           <a:lstStyle/>
           <a:p>
             <a:pPr algn="ctr"/>
+            <a:endParaRPr/>
           </a:p>
         </p:txBody>
       </p:sp>
@@ -14512,7 +14716,7 @@
           <a:noFill/>
         </p:spPr>
         <p:txBody>
-          <a:bodyPr wrap="square" lIns="36576" rIns="36576" tIns="36576" bIns="36576">
+          <a:bodyPr wrap="square" lIns="36576" tIns="36576" rIns="36576" bIns="36576">
             <a:spAutoFit/>
           </a:bodyPr>
           <a:lstStyle/>
@@ -14551,7 +14755,7 @@
           <a:noFill/>
         </p:spPr>
         <p:txBody>
-          <a:bodyPr wrap="square" lIns="36576" rIns="36576" tIns="36576" bIns="36576">
+          <a:bodyPr wrap="square" lIns="36576" tIns="36576" rIns="36576" bIns="36576">
             <a:spAutoFit/>
           </a:bodyPr>
           <a:lstStyle/>
@@ -14617,6 +14821,7 @@
           <a:lstStyle/>
           <a:p>
             <a:pPr algn="ctr"/>
+            <a:endParaRPr/>
           </a:p>
         </p:txBody>
       </p:sp>
@@ -14660,6 +14865,7 @@
           <a:lstStyle/>
           <a:p>
             <a:pPr algn="ctr"/>
+            <a:endParaRPr/>
           </a:p>
         </p:txBody>
       </p:sp>
@@ -14680,7 +14886,7 @@
           <a:noFill/>
         </p:spPr>
         <p:txBody>
-          <a:bodyPr wrap="square" lIns="36576" rIns="36576" tIns="36576" bIns="36576">
+          <a:bodyPr wrap="square" lIns="36576" tIns="36576" rIns="36576" bIns="36576">
             <a:spAutoFit/>
           </a:bodyPr>
           <a:lstStyle/>
@@ -14719,7 +14925,7 @@
           <a:noFill/>
         </p:spPr>
         <p:txBody>
-          <a:bodyPr wrap="square" lIns="36576" rIns="36576" tIns="36576" bIns="36576">
+          <a:bodyPr wrap="square" lIns="36576" tIns="36576" rIns="36576" bIns="36576">
             <a:spAutoFit/>
           </a:bodyPr>
           <a:lstStyle/>
@@ -14785,6 +14991,7 @@
           <a:lstStyle/>
           <a:p>
             <a:pPr algn="ctr"/>
+            <a:endParaRPr/>
           </a:p>
         </p:txBody>
       </p:sp>
@@ -14828,6 +15035,7 @@
           <a:lstStyle/>
           <a:p>
             <a:pPr algn="ctr"/>
+            <a:endParaRPr/>
           </a:p>
         </p:txBody>
       </p:sp>
@@ -14848,7 +15056,7 @@
           <a:noFill/>
         </p:spPr>
         <p:txBody>
-          <a:bodyPr wrap="square" lIns="36576" rIns="36576" tIns="36576" bIns="36576">
+          <a:bodyPr wrap="square" lIns="36576" tIns="36576" rIns="36576" bIns="36576">
             <a:spAutoFit/>
           </a:bodyPr>
           <a:lstStyle/>
@@ -14887,7 +15095,7 @@
           <a:noFill/>
         </p:spPr>
         <p:txBody>
-          <a:bodyPr wrap="square" lIns="36576" rIns="36576" tIns="36576" bIns="36576">
+          <a:bodyPr wrap="square" lIns="36576" tIns="36576" rIns="36576" bIns="36576">
             <a:spAutoFit/>
           </a:bodyPr>
           <a:lstStyle/>
@@ -14928,7 +15136,7 @@
           <a:noFill/>
         </p:spPr>
         <p:txBody>
-          <a:bodyPr wrap="square" lIns="36576" rIns="36576" tIns="36576" bIns="36576">
+          <a:bodyPr wrap="square" lIns="36576" tIns="36576" rIns="36576" bIns="36576">
             <a:spAutoFit/>
           </a:bodyPr>
           <a:lstStyle/>
@@ -14967,7 +15175,7 @@
           <a:noFill/>
         </p:spPr>
         <p:txBody>
-          <a:bodyPr wrap="square" lIns="45720" rIns="45720" tIns="18288" bIns="18288">
+          <a:bodyPr wrap="square" lIns="45720" tIns="18288" rIns="45720" bIns="18288">
             <a:spAutoFit/>
           </a:bodyPr>
           <a:lstStyle/>
@@ -15054,7 +15262,7 @@
 </file>
 
 <file path=ppt/slides/slide9.xml><?xml version="1.0" encoding="utf-8"?>
-<p:sld xmlns:a="http://schemas.openxmlformats.org/drawingml/2006/main" xmlns:p="http://schemas.openxmlformats.org/presentationml/2006/main" xmlns:r="http://schemas.openxmlformats.org/officeDocument/2006/relationships">
+<p:sld xmlns:a="http://schemas.openxmlformats.org/drawingml/2006/main" xmlns:r="http://schemas.openxmlformats.org/officeDocument/2006/relationships" xmlns:p="http://schemas.openxmlformats.org/presentationml/2006/main">
   <p:cSld>
     <p:spTree>
       <p:nvGrpSpPr>
@@ -15062,7 +15270,14 @@
         <p:cNvGrpSpPr/>
         <p:nvPr/>
       </p:nvGrpSpPr>
-      <p:grpSpPr/>
+      <p:grpSpPr>
+        <a:xfrm>
+          <a:off x="0" y="0"/>
+          <a:ext cx="0" cy="0"/>
+          <a:chOff x="0" y="0"/>
+          <a:chExt cx="0" cy="0"/>
+        </a:xfrm>
+      </p:grpSpPr>
       <p:sp>
         <p:nvSpPr>
           <p:cNvPr id="2" name="TextBox 1"/>
@@ -15080,7 +15295,7 @@
           <a:noFill/>
         </p:spPr>
         <p:txBody>
-          <a:bodyPr wrap="square" lIns="36576" rIns="36576" tIns="36576" bIns="36576">
+          <a:bodyPr wrap="square" lIns="36576" tIns="36576" rIns="36576" bIns="36576">
             <a:spAutoFit/>
           </a:bodyPr>
           <a:lstStyle/>
@@ -15142,6 +15357,7 @@
           <a:lstStyle/>
           <a:p>
             <a:pPr algn="ctr"/>
+            <a:endParaRPr/>
           </a:p>
         </p:txBody>
       </p:sp>
@@ -15162,7 +15378,7 @@
           <a:noFill/>
         </p:spPr>
         <p:txBody>
-          <a:bodyPr wrap="square" lIns="36576" rIns="36576" tIns="36576" bIns="36576">
+          <a:bodyPr wrap="square" lIns="36576" tIns="36576" rIns="36576" bIns="36576">
             <a:spAutoFit/>
           </a:bodyPr>
           <a:lstStyle/>
@@ -15201,7 +15417,7 @@
           <a:noFill/>
         </p:spPr>
         <p:txBody>
-          <a:bodyPr wrap="square" lIns="36576" rIns="36576" tIns="36576" bIns="36576">
+          <a:bodyPr wrap="square" lIns="36576" tIns="36576" rIns="36576" bIns="36576">
             <a:spAutoFit/>
           </a:bodyPr>
           <a:lstStyle/>
@@ -15265,6 +15481,7 @@
           <a:lstStyle/>
           <a:p>
             <a:pPr algn="ctr"/>
+            <a:endParaRPr/>
           </a:p>
         </p:txBody>
       </p:sp>
@@ -15308,6 +15525,7 @@
           <a:lstStyle/>
           <a:p>
             <a:pPr algn="ctr"/>
+            <a:endParaRPr/>
           </a:p>
         </p:txBody>
       </p:sp>
@@ -15328,7 +15546,7 @@
           <a:noFill/>
         </p:spPr>
         <p:txBody>
-          <a:bodyPr wrap="square" lIns="36576" rIns="36576" tIns="36576" bIns="36576">
+          <a:bodyPr wrap="square" lIns="36576" tIns="36576" rIns="36576" bIns="36576">
             <a:spAutoFit/>
           </a:bodyPr>
           <a:lstStyle/>
@@ -15367,7 +15585,7 @@
           <a:noFill/>
         </p:spPr>
         <p:txBody>
-          <a:bodyPr wrap="square" lIns="36576" rIns="36576" tIns="36576" bIns="36576">
+          <a:bodyPr wrap="square" lIns="36576" tIns="36576" rIns="36576" bIns="36576">
             <a:spAutoFit/>
           </a:bodyPr>
           <a:lstStyle/>
@@ -15433,6 +15651,7 @@
           <a:lstStyle/>
           <a:p>
             <a:pPr algn="ctr"/>
+            <a:endParaRPr/>
           </a:p>
         </p:txBody>
       </p:sp>
@@ -15476,6 +15695,7 @@
           <a:lstStyle/>
           <a:p>
             <a:pPr algn="ctr"/>
+            <a:endParaRPr/>
           </a:p>
         </p:txBody>
       </p:sp>
@@ -15496,7 +15716,7 @@
           <a:noFill/>
         </p:spPr>
         <p:txBody>
-          <a:bodyPr wrap="square" lIns="36576" rIns="36576" tIns="36576" bIns="36576">
+          <a:bodyPr wrap="square" lIns="36576" tIns="36576" rIns="36576" bIns="36576">
             <a:spAutoFit/>
           </a:bodyPr>
           <a:lstStyle/>
@@ -15535,7 +15755,7 @@
           <a:noFill/>
         </p:spPr>
         <p:txBody>
-          <a:bodyPr wrap="square" lIns="36576" rIns="36576" tIns="36576" bIns="36576">
+          <a:bodyPr wrap="square" lIns="36576" tIns="36576" rIns="36576" bIns="36576">
             <a:spAutoFit/>
           </a:bodyPr>
           <a:lstStyle/>
@@ -15601,6 +15821,7 @@
           <a:lstStyle/>
           <a:p>
             <a:pPr algn="ctr"/>
+            <a:endParaRPr/>
           </a:p>
         </p:txBody>
       </p:sp>
@@ -15644,6 +15865,7 @@
           <a:lstStyle/>
           <a:p>
             <a:pPr algn="ctr"/>
+            <a:endParaRPr/>
           </a:p>
         </p:txBody>
       </p:sp>
@@ -15664,7 +15886,7 @@
           <a:noFill/>
         </p:spPr>
         <p:txBody>
-          <a:bodyPr wrap="square" lIns="36576" rIns="36576" tIns="36576" bIns="36576">
+          <a:bodyPr wrap="square" lIns="36576" tIns="36576" rIns="36576" bIns="36576">
             <a:spAutoFit/>
           </a:bodyPr>
           <a:lstStyle/>
@@ -15703,7 +15925,7 @@
           <a:noFill/>
         </p:spPr>
         <p:txBody>
-          <a:bodyPr wrap="square" lIns="36576" rIns="36576" tIns="36576" bIns="36576">
+          <a:bodyPr wrap="square" lIns="36576" tIns="36576" rIns="36576" bIns="36576">
             <a:spAutoFit/>
           </a:bodyPr>
           <a:lstStyle/>
@@ -15744,7 +15966,7 @@
           <a:noFill/>
         </p:spPr>
         <p:txBody>
-          <a:bodyPr wrap="square" lIns="36576" rIns="36576" tIns="36576" bIns="36576">
+          <a:bodyPr wrap="square" lIns="36576" tIns="36576" rIns="36576" bIns="36576">
             <a:spAutoFit/>
           </a:bodyPr>
           <a:lstStyle/>
@@ -15783,7 +16005,7 @@
           <a:noFill/>
         </p:spPr>
         <p:txBody>
-          <a:bodyPr wrap="square" lIns="45720" rIns="45720" tIns="18288" bIns="18288">
+          <a:bodyPr wrap="square" lIns="45720" tIns="18288" rIns="45720" bIns="18288">
             <a:spAutoFit/>
           </a:bodyPr>
           <a:lstStyle/>
